--- a/preview/OR.PA/OR.PA_pitchbook.pptx
+++ b/preview/OR.PA/OR.PA_pitchbook.pptx
@@ -6138,7 +6138,7 @@
                 </a:solidFill>
                 <a:latin typeface="Calibri"/>
               </a:rPr>
-              <a:t>Les marges brutes progressent de 72.4% en 2022 à 74.3% en 2025 grâce à l'optimisation des coûts matières premières et à la hausse des prix (+2.5% en moyenne annuelle). Les marges EBITDA et nettes se stabilisent autour de 24.3% et 14.5% respectivement, reflétant un levier opérationnel maîtrisé et un mix produits favorable. Cette stabilité suggère une durabilité des marges à moyen terme.</a:t>
+              <a:t>Les marges brute (74.3%), EBITDA (24.3%) et nette (13.9%) affichent une stabilité remarquable depuis 2022, avec une légère compression nette en 2025 due à des coûts logistiques et marketing accrus. Cette résilience s'explique par le levier opérationnel, un mix produit premium et une politique de pricing agressive. Pour l'investisseur, cela implique une durabilité des marges et un potentiel de re-rating si la compression nette se résorbe.</a:t>
             </a:r>
           </a:p>
         </p:txBody>
@@ -7622,7 +7622,7 @@
                           </a:solidFill>
                           <a:latin typeface="Calibri"/>
                         </a:rPr>
-                        <a:t>340 EUR</a:t>
+                        <a:t>330 EUR</a:t>
                       </a:r>
                     </a:p>
                   </a:txBody>
@@ -7693,7 +7693,7 @@
                           </a:solidFill>
                           <a:latin typeface="Calibri"/>
                         </a:rPr>
-                        <a:t>-3,1 %</a:t>
+                        <a:t>-5,9 %</a:t>
                       </a:r>
                     </a:p>
                   </a:txBody>
@@ -9480,7 +9480,7 @@
                 </a:solidFill>
                 <a:latin typeface="Calibri"/>
               </a:rPr>
-              <a:t>Avec un WACC de 8.5% et une TGR de 2.0%, le prix implicite DCF est de 375 EUR, soit un upside de 7% vs le cours actuel. La prime actuelle semble refléter une croissance déjà anticipée, mais les catalyseurs asiatiques pourraient justifier une revalorisation.</a:t>
+              <a:t>Avec un WACC de 8.5% et une TGR de 2.0%, le prix implicite DCF est de 395 EUR, soit un upside de 12.6% vs cours actuel. La prime de croissance est partiellement pricee, mais les catalyseurs (Chine, innovation) pourraient justifier une revalorisation. Un risque d'execution sur les coûts logistiques ou une dégradation en Chine pourrait limiter l'upside.</a:t>
             </a:r>
           </a:p>
         </p:txBody>
@@ -10544,7 +10544,7 @@
                           </a:solidFill>
                           <a:latin typeface="Calibri"/>
                         </a:rPr>
-                        <a:t>42,5</a:t>
+                        <a:t>35,2</a:t>
                       </a:r>
                     </a:p>
                   </a:txBody>
@@ -10567,7 +10567,7 @@
                           </a:solidFill>
                           <a:latin typeface="Calibri"/>
                         </a:rPr>
-                        <a:t>15,2x</a:t>
+                        <a:t>15,8x</a:t>
                       </a:r>
                     </a:p>
                   </a:txBody>
@@ -10590,7 +10590,7 @@
                           </a:solidFill>
                           <a:latin typeface="Calibri"/>
                         </a:rPr>
-                        <a:t>3,8x</a:t>
+                        <a:t>3,1x</a:t>
                       </a:r>
                     </a:p>
                   </a:txBody>
@@ -10636,7 +10636,7 @@
                           </a:solidFill>
                           <a:latin typeface="Calibri"/>
                         </a:rPr>
-                        <a:t>76,1 %</a:t>
+                        <a:t>72,0 %</a:t>
                       </a:r>
                     </a:p>
                   </a:txBody>
@@ -10659,7 +10659,7 @@
                           </a:solidFill>
                           <a:latin typeface="Calibri"/>
                         </a:rPr>
-                        <a:t>22,5 %</a:t>
+                        <a:t>22,0 %</a:t>
                       </a:r>
                     </a:p>
                   </a:txBody>
@@ -10684,7 +10684,7 @@
                           </a:solidFill>
                           <a:latin typeface="Calibri"/>
                         </a:rPr>
-                        <a:t>Unilever Beauty &amp; Personal Car</a:t>
+                        <a:t>Shiseido</a:t>
                       </a:r>
                     </a:p>
                   </a:txBody>
@@ -10707,7 +10707,7 @@
                           </a:solidFill>
                           <a:latin typeface="Calibri"/>
                         </a:rPr>
-                        <a:t>ULVR.L</a:t>
+                        <a:t>4911.T</a:t>
                       </a:r>
                     </a:p>
                   </a:txBody>
@@ -10730,7 +10730,7 @@
                           </a:solidFill>
                           <a:latin typeface="Calibri"/>
                         </a:rPr>
-                        <a:t>110,2</a:t>
+                        <a:t>5,8</a:t>
                       </a:r>
                     </a:p>
                   </a:txBody>
@@ -10753,7 +10753,7 @@
                           </a:solidFill>
                           <a:latin typeface="Calibri"/>
                         </a:rPr>
-                        <a:t>13,8x</a:t>
+                        <a:t>8,2x</a:t>
                       </a:r>
                     </a:p>
                   </a:txBody>
@@ -10776,7 +10776,7 @@
                           </a:solidFill>
                           <a:latin typeface="Calibri"/>
                         </a:rPr>
-                        <a:t>2,9x</a:t>
+                        <a:t>1,2x</a:t>
                       </a:r>
                     </a:p>
                   </a:txBody>
@@ -10799,7 +10799,7 @@
                           </a:solidFill>
                           <a:latin typeface="Calibri"/>
                         </a:rPr>
-                        <a:t>22,4x</a:t>
+                        <a:t>12,5x</a:t>
                       </a:r>
                     </a:p>
                   </a:txBody>
@@ -10822,7 +10822,7 @@
                           </a:solidFill>
                           <a:latin typeface="Calibri"/>
                         </a:rPr>
-                        <a:t>58,2 %</a:t>
+                        <a:t>68,0 %</a:t>
                       </a:r>
                     </a:p>
                   </a:txBody>
@@ -10845,7 +10845,7 @@
                           </a:solidFill>
                           <a:latin typeface="Calibri"/>
                         </a:rPr>
-                        <a:t>20,1 %</a:t>
+                        <a:t>18,0 %</a:t>
                       </a:r>
                     </a:p>
                   </a:txBody>
@@ -10870,7 +10870,7 @@
                           </a:solidFill>
                           <a:latin typeface="Calibri"/>
                         </a:rPr>
-                        <a:t>Shiseido</a:t>
+                        <a:t>Unilever (Beauty &amp; Personal Ca</a:t>
                       </a:r>
                     </a:p>
                   </a:txBody>
@@ -10893,7 +10893,7 @@
                           </a:solidFill>
                           <a:latin typeface="Calibri"/>
                         </a:rPr>
-                        <a:t>4911.T</a:t>
+                        <a:t>ULVR.L</a:t>
                       </a:r>
                     </a:p>
                   </a:txBody>
@@ -10916,7 +10916,7 @@
                           </a:solidFill>
                           <a:latin typeface="Calibri"/>
                         </a:rPr>
-                        <a:t>8,9</a:t>
+                        <a:t>120,0</a:t>
                       </a:r>
                     </a:p>
                   </a:txBody>
@@ -10939,7 +10939,7 @@
                           </a:solidFill>
                           <a:latin typeface="Calibri"/>
                         </a:rPr>
-                        <a:t>10,5x</a:t>
+                        <a:t>14,2x</a:t>
                       </a:r>
                     </a:p>
                   </a:txBody>
@@ -10962,7 +10962,7 @@
                           </a:solidFill>
                           <a:latin typeface="Calibri"/>
                         </a:rPr>
-                        <a:t>2,1x</a:t>
+                        <a:t>2,8x</a:t>
                       </a:r>
                     </a:p>
                   </a:txBody>
@@ -10985,7 +10985,7 @@
                           </a:solidFill>
                           <a:latin typeface="Calibri"/>
                         </a:rPr>
-                        <a:t>28,7x</a:t>
+                        <a:t>22,1x</a:t>
                       </a:r>
                     </a:p>
                   </a:txBody>
@@ -11008,7 +11008,7 @@
                           </a:solidFill>
                           <a:latin typeface="Calibri"/>
                         </a:rPr>
-                        <a:t>71,2 %</a:t>
+                        <a:t>55,0 %</a:t>
                       </a:r>
                     </a:p>
                   </a:txBody>
@@ -11031,7 +11031,7 @@
                           </a:solidFill>
                           <a:latin typeface="Calibri"/>
                         </a:rPr>
-                        <a:t>18,9 %</a:t>
+                        <a:t>20,0 %</a:t>
                       </a:r>
                     </a:p>
                   </a:txBody>
@@ -11056,7 +11056,7 @@
                           </a:solidFill>
                           <a:latin typeface="Calibri"/>
                         </a:rPr>
-                        <a:t>Beiersdorf</a:t>
+                        <a:t>Procter &amp; Gamble (Beauty)</a:t>
                       </a:r>
                     </a:p>
                   </a:txBody>
@@ -11079,7 +11079,7 @@
                           </a:solidFill>
                           <a:latin typeface="Calibri"/>
                         </a:rPr>
-                        <a:t>BEI.DE</a:t>
+                        <a:t>PG</a:t>
                       </a:r>
                     </a:p>
                   </a:txBody>
@@ -11102,7 +11102,7 @@
                           </a:solidFill>
                           <a:latin typeface="Calibri"/>
                         </a:rPr>
-                        <a:t>28,7</a:t>
+                        <a:t>380,0</a:t>
                       </a:r>
                     </a:p>
                   </a:txBody>
@@ -11148,7 +11148,7 @@
                           </a:solidFill>
                           <a:latin typeface="Calibri"/>
                         </a:rPr>
-                        <a:t>3,2x</a:t>
+                        <a:t>3,5x</a:t>
                       </a:r>
                     </a:p>
                   </a:txBody>
@@ -11171,7 +11171,7 @@
                           </a:solidFill>
                           <a:latin typeface="Calibri"/>
                         </a:rPr>
-                        <a:t>—</a:t>
+                        <a:t>28,5x</a:t>
                       </a:r>
                     </a:p>
                   </a:txBody>
@@ -11194,7 +11194,7 @@
                           </a:solidFill>
                           <a:latin typeface="Calibri"/>
                         </a:rPr>
-                        <a:t>67,8 %</a:t>
+                        <a:t>52,0 %</a:t>
                       </a:r>
                     </a:p>
                   </a:txBody>
@@ -11217,7 +11217,7 @@
                           </a:solidFill>
                           <a:latin typeface="Calibri"/>
                         </a:rPr>
-                        <a:t>21,3 %</a:t>
+                        <a:t>23,0 %</a:t>
                       </a:r>
                     </a:p>
                   </a:txBody>
@@ -11242,7 +11242,7 @@
                           </a:solidFill>
                           <a:latin typeface="Calibri"/>
                         </a:rPr>
-                        <a:t>Procter &amp; Gamble Beauty</a:t>
+                        <a:t>Beiersdorf</a:t>
                       </a:r>
                     </a:p>
                   </a:txBody>
@@ -11265,7 +11265,7 @@
                           </a:solidFill>
                           <a:latin typeface="Calibri"/>
                         </a:rPr>
-                        <a:t>PG</a:t>
+                        <a:t>BEI.DE</a:t>
                       </a:r>
                     </a:p>
                   </a:txBody>
@@ -11288,7 +11288,7 @@
                           </a:solidFill>
                           <a:latin typeface="Calibri"/>
                         </a:rPr>
-                        <a:t>380,5</a:t>
+                        <a:t>28,5</a:t>
                       </a:r>
                     </a:p>
                   </a:txBody>
@@ -11311,7 +11311,7 @@
                           </a:solidFill>
                           <a:latin typeface="Calibri"/>
                         </a:rPr>
-                        <a:t>18,7x</a:t>
+                        <a:t>13,5x</a:t>
                       </a:r>
                     </a:p>
                   </a:txBody>
@@ -11334,7 +11334,7 @@
                           </a:solidFill>
                           <a:latin typeface="Calibri"/>
                         </a:rPr>
-                        <a:t>4,1x</a:t>
+                        <a:t>2,9x</a:t>
                       </a:r>
                     </a:p>
                   </a:txBody>
@@ -11357,7 +11357,7 @@
                           </a:solidFill>
                           <a:latin typeface="Calibri"/>
                         </a:rPr>
-                        <a:t>—</a:t>
+                        <a:t>25,3x</a:t>
                       </a:r>
                     </a:p>
                   </a:txBody>
@@ -11380,7 +11380,7 @@
                           </a:solidFill>
                           <a:latin typeface="Calibri"/>
                         </a:rPr>
-                        <a:t>52,3 %</a:t>
+                        <a:t>65,0 %</a:t>
                       </a:r>
                     </a:p>
                   </a:txBody>
@@ -11403,7 +11403,7 @@
                           </a:solidFill>
                           <a:latin typeface="Calibri"/>
                         </a:rPr>
-                        <a:t>23,9 %</a:t>
+                        <a:t>19,0 %</a:t>
                       </a:r>
                     </a:p>
                   </a:txBody>
@@ -11497,7 +11497,7 @@
                           </a:solidFill>
                           <a:latin typeface="Calibri"/>
                         </a:rPr>
-                        <a:t>15,2x</a:t>
+                        <a:t>14,2x</a:t>
                       </a:r>
                     </a:p>
                   </a:txBody>
@@ -11520,7 +11520,7 @@
                           </a:solidFill>
                           <a:latin typeface="Calibri"/>
                         </a:rPr>
-                        <a:t>3,2x</a:t>
+                        <a:t>2,9x</a:t>
                       </a:r>
                     </a:p>
                   </a:txBody>
@@ -11543,7 +11543,7 @@
                           </a:solidFill>
                           <a:latin typeface="Calibri"/>
                         </a:rPr>
-                        <a:t>28,7x</a:t>
+                        <a:t>25,3x</a:t>
                       </a:r>
                     </a:p>
                   </a:txBody>
@@ -11566,7 +11566,7 @@
                           </a:solidFill>
                           <a:latin typeface="Calibri"/>
                         </a:rPr>
-                        <a:t>67,8 %</a:t>
+                        <a:t>65,0 %</a:t>
                       </a:r>
                     </a:p>
                   </a:txBody>
@@ -11589,7 +11589,7 @@
                           </a:solidFill>
                           <a:latin typeface="Calibri"/>
                         </a:rPr>
-                        <a:t>21,3 %</a:t>
+                        <a:t>20,0 %</a:t>
                       </a:r>
                     </a:p>
                   </a:txBody>
@@ -11634,7 +11634,7 @@
                 </a:solidFill>
                 <a:latin typeface="Calibri"/>
               </a:rPr>
-              <a:t>L'Oréal affiche un EV/EBITDA de 17.6x vs une médiane peers de 14.1x (+25%), et un P/E de 30.6x vs 24.5x (+25%). Cette prime est justifiée par une croissance organique supérieure (3.5-4% vs 2-3% peers) et une résilience des marges. Une convergence vers la médiane impliquerait un downside de 15%, peu probable sans choc sectoriel.</a:t>
+              <a:t>L'Oréal se négocie à 17.6x EV/EBITDA vs médiane peers à 16.8x (+5%), et à 30.6x P/E vs 28.5x (+7%). La prime reflète une croissance organique supérieure (+4.5% vs +3.2% peers) et des marges plus résilientes. Une convergence vers la médiane peers impliquerait un downside de 8-10%, tandis qu'une prime maintenue justifierait l'upside actuel.</a:t>
             </a:r>
           </a:p>
         </p:txBody>
@@ -12292,7 +12292,7 @@
                 </a:solidFill>
                 <a:latin typeface="Calibri"/>
               </a:rPr>
-              <a:t>Avec un WACC de 8.5% et une TGR de 2.0%, le prix implicite DCF est de 375 EUR, soit un upside de 7% vs le cours actuel. La prime actuelle semble refléter une croissance déjà anticipée, mais les catalyseurs asiatiques pourraient justifier une revalorisation.</a:t>
+              <a:t>Avec un WACC de 8.5% et une TGR de 2.0%, le prix implicite DCF est de 395 EUR, soit un upside de 12.6% vs cours actuel. La prime de croissance est partiellement pricee, mais les catalyseurs (Chine, innovation) pourraient justifier une revalorisation. Un risque d'execution sur les coûts logistiques ou une dégradation en Chine pourrait limiter l'upside.</a:t>
             </a:r>
           </a:p>
         </p:txBody>
@@ -13265,7 +13265,7 @@
                 </a:solidFill>
                 <a:latin typeface="Calibri"/>
               </a:rPr>
-              <a:t>Valorisation excessive</a:t>
+              <a:t>Prime de valorisation excessive</a:t>
             </a:r>
           </a:p>
         </p:txBody>
@@ -13300,7 +13300,7 @@
                 </a:solidFill>
                 <a:latin typeface="Calibri"/>
               </a:rPr>
-              <a:t>Le P/E de 30.56x est 50% supérieur à la moyenne sectorielle de 20.3x, reflétant une valorisation excessive pour un secteur mature comme les cosmétiques. Les marges nettes de 13.9% en 2025 supposent une maîtrise parfaite des coûts, alors que les pressions salariales en Europe (+4.5% en 2024) et la hausse des matières premières (+12% depuis 2022) menacent cette stabilité. L'EV/EBITDA à 17.55x ignore le risque de décote en cas de ralentissement des ventes premium, déjà…</a:t>
+              <a:t>Le P/E de 30.56x surpasse de 50% la moyenne sectorielle des cosmétiques (20.3x), reflétant une prime de valorisation déjà intégrée dans le cours actuel.</a:t>
             </a:r>
           </a:p>
         </p:txBody>
@@ -13421,7 +13421,7 @@
                 </a:solidFill>
                 <a:latin typeface="Calibri"/>
               </a:rPr>
-              <a:t>Dépendance produits clés</a:t>
+              <a:t>Risque prix-volume</a:t>
             </a:r>
           </a:p>
         </p:txBody>
@@ -13456,7 +13456,7 @@
                 </a:solidFill>
                 <a:latin typeface="Calibri"/>
               </a:rPr>
-              <a:t>L'Altman Z-score de 5.67 masque une dépendance critique aux marques phares : 60% du CA provient de 10 produits, dont 3 représentent 35% des marges. Une perte de part de marché sur un seul produit (ex : L'Oréal Paris) réduirait le ROE de 3 points, passant de 17.5% à 14.5%, un seuil critique pour les investisseurs. Les coûts R&amp;D (3.2% du CA) n'ont pas généré d'innovation disruptive depuis 2018, malgré un budget en hausse de 15%.</a:t>
+              <a:t>Les marges nettes de 13.9% stagnent depuis 2021 malgré des hausses de prix de 8% en 2023, signalant une érosion de pouvoir de fixation des prix.</a:t>
             </a:r>
           </a:p>
         </p:txBody>
@@ -13577,7 +13577,7 @@
                 </a:solidFill>
                 <a:latin typeface="Calibri"/>
               </a:rPr>
-              <a:t>Risque liquidité</a:t>
+              <a:t>Stagnation marges</a:t>
             </a:r>
           </a:p>
         </p:txBody>
@@ -13612,7 +13612,7 @@
                 </a:solidFill>
                 <a:latin typeface="Calibri"/>
               </a:rPr>
-              <a:t>Le NetDebt/EBITDA de 0.02x est artificiellement bas grâce à une trésorerie de 4.2 Md€, mais 68% est bloquée dans des filiales étrangères, limitant sa liquidité immédiate. Une crise géopolitique (ex : tensions USA-Chine) pourrait geler 2.8 Md€ de fonds, réduisant la capacité de réaction à 1.4x l'EBITDA, un niveau dangereux face à un concurrent comme Estée Lauder (0.8x).</a:t>
+              <a:t>La R&amp;D premium à 3.1% du CA (2023) n'a généré aucun blockbuster depuis 2019, remettant en cause son efficacité.</a:t>
             </a:r>
           </a:p>
         </p:txBody>
@@ -13826,7 +13826,7 @@
                           </a:solidFill>
                           <a:latin typeface="Calibri"/>
                         </a:rPr>
-                        <a:t>Ralentissement du PIB chinois &lt;4% en 2026</a:t>
+                        <a:t>Ralentissement économique en Chine de -3pp vs consensus 2026</a:t>
                       </a:r>
                     </a:p>
                   </a:txBody>
@@ -13897,7 +13897,7 @@
                           </a:solidFill>
                           <a:latin typeface="Calibri"/>
                         </a:rPr>
-                        <a:t>Interdiction des tests sur animaux en UE étendue à d'autres régions</a:t>
+                        <a:t>Pénétration accélérée de l'IA dans le maquillage (-5pp part de marché)</a:t>
                       </a:r>
                     </a:p>
                   </a:txBody>
@@ -13968,7 +13968,7 @@
                           </a:solidFill>
                           <a:latin typeface="Calibri"/>
                         </a:rPr>
-                        <a:t>Perte de parts de marché en Amérique du Nord &gt;3 points</a:t>
+                        <a:t>Échec du lancement de la gamme premium en Inde (CA &lt;100m EUR en 2026)</a:t>
                       </a:r>
                     </a:p>
                   </a:txBody>
@@ -14974,7 +14974,7 @@
                 </a:solidFill>
                 <a:latin typeface="Calibri"/>
               </a:rPr>
-              <a:t>Neutre +</a:t>
+              <a:t>Positif</a:t>
             </a:r>
           </a:p>
         </p:txBody>
@@ -15044,7 +15044,7 @@
                 </a:solidFill>
                 <a:latin typeface="Calibri"/>
               </a:rPr>
-              <a:t>Score agrege : +0,140</a:t>
+              <a:t>Score agrege : +0,280</a:t>
             </a:r>
           </a:p>
         </p:txBody>
@@ -15356,7 +15356,7 @@
                 </a:solidFill>
                 <a:latin typeface="Calibri"/>
               </a:rPr>
-              <a:t>48,0 %</a:t>
+              <a:t>46,0 %</a:t>
             </a:r>
           </a:p>
         </p:txBody>
@@ -15812,7 +15812,7 @@
                           </a:solidFill>
                           <a:latin typeface="Calibri"/>
                         </a:rPr>
-                        <a:t>6</a:t>
+                        <a:t>10</a:t>
                       </a:r>
                     </a:p>
                   </a:txBody>
@@ -15835,7 +15835,7 @@
                           </a:solidFill>
                           <a:latin typeface="Calibri"/>
                         </a:rPr>
-                        <a:t>+0,330</a:t>
+                        <a:t>+0,460</a:t>
                       </a:r>
                     </a:p>
                   </a:txBody>
@@ -15858,7 +15858,7 @@
                           </a:solidFill>
                           <a:latin typeface="Calibri"/>
                         </a:rPr>
-                        <a:t>Croissance Asie +12% en 2026 avec lancement de 50 nouveaux produits en Chine | +1.8Md EUR de revenus supplémentaires | Horizon 2026-2027</a:t>
+                        <a:t>Expansion en Chine : +15% CA organique en 2026 via digitalisation et lancements premium | Mécanisme : croissance volume + mix prix | Horizon : 12-18 mois</a:t>
                       </a:r>
                     </a:p>
                   </a:txBody>
@@ -15906,7 +15906,7 @@
                           </a:solidFill>
                           <a:latin typeface="Calibri"/>
                         </a:rPr>
-                        <a:t>11</a:t>
+                        <a:t>7</a:t>
                       </a:r>
                     </a:p>
                   </a:txBody>
@@ -15929,7 +15929,7 @@
                           </a:solidFill>
                           <a:latin typeface="Calibri"/>
                         </a:rPr>
-                        <a:t>+0,480</a:t>
+                        <a:t>+0,360</a:t>
                       </a:r>
                     </a:p>
                   </a:txBody>
@@ -16023,7 +16023,7 @@
                           </a:solidFill>
                           <a:latin typeface="Calibri"/>
                         </a:rPr>
-                        <a:t>+0,190</a:t>
+                        <a:t>+0,180</a:t>
                       </a:r>
                     </a:p>
                   </a:txBody>
@@ -16046,7 +16046,7 @@
                           </a:solidFill>
                           <a:latin typeface="Calibri"/>
                         </a:rPr>
-                        <a:t>Ralentissement économique en Chine -5% de croissance organique | Baisse des ventes premium de -8% | Horizon 2026-2027</a:t>
+                        <a:t>Ralentissement Chine : -3pp croissance CA organique si tensions géopolitiques | Mécanisme : pression sur le mix prix et volumes | Horizon : 6-12 mois, impact…</a:t>
                       </a:r>
                     </a:p>
                   </a:txBody>
@@ -16091,7 +16091,7 @@
                 </a:solidFill>
                 <a:latin typeface="Calibri"/>
               </a:rPr>
-              <a:t>La presse financière souligne une dynamique positive pour L'Oréal cette semaine, portée par des partenariats technologiques et des initiatives durables. Cependant, les incertitudes liées aux tensions commerciales et géopolitiques pèsent sur le sentiment global.</a:t>
+              <a:t>La presse financière souligne une dynamique positive pour L'Oréal cette semaine, portée par des partenariats technologiques et des initiatives durables. Cependant, les tensions commerciales et géopolitiques introduisent une note de prudence sur certains segments.</a:t>
             </a:r>
           </a:p>
         </p:txBody>
@@ -19029,7 +19029,7 @@
                 </a:solidFill>
                 <a:latin typeface="Calibri"/>
               </a:rPr>
-              <a:t>L'Oréal se négocie à une prime de 25% vs la médiane des pairs sur EV/EBITDA (17.6x vs 14.1x). Cette prime est justifiée par une croissance organique supérieure et une résilience des marges.</a:t>
+              <a:t>L'Oréal se négocie à 17.6x EV/EBITDA vs médiane peers à 16.8x, soit une prime de 5%. Le P/E de 30.6x reflète une croissance supérieure et une qualité d'actifs reconnue. La prime semble justifiée par la résilience des marges et la diversification géographique.</a:t>
             </a:r>
           </a:p>
         </p:txBody>
@@ -19359,7 +19359,7 @@
                 </a:solidFill>
                 <a:latin typeface="Calibri"/>
               </a:rPr>
-              <a:t>Prix cible base : 385 EUR  ·  Upside : +9,7 %  ·  Bear : 340 EUR (-3,1 %)  ·  Bull : 420 EUR (+19,7 %)</a:t>
+              <a:t>Prix cible base : 385 EUR  ·  Upside : +9,7 %  ·  Bear : 330 EUR (-5,9 %)  ·  Bull : 420 EUR (+19,7 %)</a:t>
             </a:r>
           </a:p>
         </p:txBody>
@@ -19515,7 +19515,7 @@
                 </a:solidFill>
                 <a:latin typeface="Calibri"/>
               </a:rPr>
-              <a:t>Leadership mondial</a:t>
+              <a:t>Leader mondial</a:t>
             </a:r>
           </a:p>
         </p:txBody>
@@ -19550,7 +19550,7 @@
                 </a:solidFill>
                 <a:latin typeface="Calibri"/>
               </a:rPr>
-              <a:t>L'Oréal devrait bénéficier d'une croissance organique de 3.5% en 2026 grâce à l'Asie (+12% en Chine) et aux innovations anti-âge</a:t>
+              <a:t>L'Oréal devrait bénéficier d'une croissance organique de 4.5% en 2026 grâce à l'expansion en Chine (+15% CA) et aux lancements de produits premiumisés</a:t>
             </a:r>
           </a:p>
         </p:txBody>
@@ -19628,7 +19628,7 @@
                 </a:solidFill>
                 <a:latin typeface="Calibri"/>
               </a:rPr>
-              <a:t>Marges premium</a:t>
+              <a:t>R&amp;D premium</a:t>
             </a:r>
           </a:p>
         </p:txBody>
@@ -19663,7 +19663,7 @@
                 </a:solidFill>
                 <a:latin typeface="Calibri"/>
               </a:rPr>
-              <a:t>Les marges EBITDA devraient se stabiliser à 24.5% en 2027 grâce à l'automatisation des usines et la réduction des coûts logistiques</a:t>
+              <a:t>La marge EBITDA devrait se stabiliser à 25.0% en 2027 via optimisation des coûts logistiques et mix produit favorable</a:t>
             </a:r>
           </a:p>
         </p:txBody>
@@ -19741,7 +19741,7 @@
                 </a:solidFill>
                 <a:latin typeface="Calibri"/>
               </a:rPr>
-              <a:t>Innovation R&amp;D</a:t>
+              <a:t>Levier opérationnel</a:t>
             </a:r>
           </a:p>
         </p:txBody>
@@ -19776,7 +19776,7 @@
                 </a:solidFill>
                 <a:latin typeface="Calibri"/>
               </a:rPr>
-              <a:t>Le groupe vise 20% de part de marché en Inde d'ici 2027, soit +3 points vs 2025.</a:t>
+              <a:t>Le ROIC de 20%+ et la trésorerie nette de 5.2mds EUR soutiennent une politique de dividende progressive (+5% annuel) et des rachats d'actions.</a:t>
             </a:r>
           </a:p>
         </p:txBody>
@@ -19932,7 +19932,7 @@
                 </a:solidFill>
                 <a:latin typeface="Calibri"/>
               </a:rPr>
-              <a:t>Dépendance Asie</a:t>
+              <a:t>Risque Chine</a:t>
             </a:r>
           </a:p>
         </p:txBody>
@@ -19967,7 +19967,7 @@
                 </a:solidFill>
                 <a:latin typeface="Calibri"/>
               </a:rPr>
-              <a:t>Ralentissement économique en Chine -5% de croissance organique | Baisse des ventes premium de -8% | Horizon 2026-2027</a:t>
+              <a:t>Ralentissement Chine : -3pp croissance CA organique si tensions géopolitiques | Mécanisme : pression sur le mix prix et volumes | Horizon : 6-12 mois, impact -8% CA</a:t>
             </a:r>
           </a:p>
         </p:txBody>
@@ -20045,7 +20045,7 @@
                 </a:solidFill>
                 <a:latin typeface="Calibri"/>
               </a:rPr>
-              <a:t>Concurrence Estée Lauder</a:t>
+              <a:t>Concurrence IA</a:t>
             </a:r>
           </a:p>
         </p:txBody>
@@ -20080,7 +20080,7 @@
                 </a:solidFill>
                 <a:latin typeface="Calibri"/>
               </a:rPr>
-              <a:t>Concurrence accrue d'Estée Lauder en Amérique du Nord | Perte de parts de marché de 2 points | Horizon 2026</a:t>
+              <a:t>Concurrence IA : perte de 5pp de part de marché en maquillage face à outils digitaux | Mécanisme : baisse prix et volumes | Horizon : 12-24 mois, impact -3% marge nette</a:t>
             </a:r>
           </a:p>
         </p:txBody>
@@ -20158,7 +20158,7 @@
                 </a:solidFill>
                 <a:latin typeface="Calibri"/>
               </a:rPr>
-              <a:t>Réglementation cosmétique</a:t>
+              <a:t>Pressions prix</a:t>
             </a:r>
           </a:p>
         </p:txBody>
@@ -20193,7 +20193,7 @@
                 </a:solidFill>
                 <a:latin typeface="Calibri"/>
               </a:rPr>
-              <a:t>Réglementation européenne sur les ingrédients +10% de coûts R&amp;D | Compression des marges de 150 bps | Horizon 2027</a:t>
+              <a:t>Pressions prix matières : +8% coût des ingrédients en 2026 non répercutable | Mécanisme : compression marges brute et EBITDA | Horizon : 12 mois, impact -150bps EBITDA</a:t>
             </a:r>
           </a:p>
         </p:txBody>
@@ -20470,7 +20470,7 @@
                 </a:solidFill>
                 <a:latin typeface="Calibri"/>
               </a:rPr>
-              <a:t>vs 15,2x médiane peers</a:t>
+              <a:t>vs 14,2x médiane peers</a:t>
             </a:r>
           </a:p>
         </p:txBody>
@@ -20973,7 +20973,7 @@
                 </a:solidFill>
                 <a:latin typeface="Calibri"/>
               </a:rPr>
-              <a:t>+0,140</a:t>
+              <a:t>+0,280</a:t>
             </a:r>
           </a:p>
         </p:txBody>
@@ -21043,7 +21043,7 @@
                 </a:solidFill>
                 <a:latin typeface="Calibri"/>
               </a:rPr>
-              <a:t>Neutre +  ·  20 articles</a:t>
+              <a:t>Positif  ·  20 articles</a:t>
             </a:r>
           </a:p>
         </p:txBody>
@@ -23672,7 +23672,7 @@
                 </a:solidFill>
                 <a:latin typeface="Calibri"/>
               </a:rPr>
-              <a:t>L'Oréal affiche une résilience opérationnelle remarquable avec des marges stables malgré un environnement macro difficile. La diversification géographique et segmentaire réduit la volatilité des revenus et soutient la croissance organique à 3-5% par an.</a:t>
+              <a:t>L'Oréal affiche une résilience opérationnelle remarquable avec des marges stables et une croissance organique soutenue. Le modèle premium diversifié et l'innovation continue renforcent sa position de leader mondial. La valorisation reste attractive malgré une prime modérée vs peers.</a:t>
             </a:r>
           </a:p>
         </p:txBody>
@@ -24715,7 +24715,7 @@
                 </a:solidFill>
                 <a:latin typeface="Calibri"/>
               </a:rPr>
-              <a:t>Dépendance Asie  ·  Concurrence Estée Lauder</a:t>
+              <a:t>Risque Chine  ·  Concurrence IA</a:t>
             </a:r>
           </a:p>
         </p:txBody>
@@ -25949,7 +25949,7 @@
                 </a:solidFill>
                 <a:latin typeface="Calibri"/>
               </a:rPr>
-              <a:t>L'Oréal S.A. est le leader mondial des produits cosmétiques avec une présence dans 150 pays. Positionné sur les segments premium, mass-market et dermo-cosmétique, le groupe mise sur l'innovation R&amp;D et le digital pour capter la demande asiatique et anti-âge. Ses avantages concurrentiels incluent une marque forte (Lancôme, Garnier), une chaîne de distribution intégrée et une efficacité logistique mondiale. L'entreprise articule son activité autour de deux segments stratégiques :</a:t>
+              <a:t>L'Oréal S.A. est le leader mondial des produits de beauté avec un portefeuille diversifié couvrant tous les segments (soin, maquillage, coiffure, parfums). Positionné sur le premium avec des marques comme Lancôme, L'Oréal Paris et Garnier, le groupe cible une clientèle mondiale via distribution sélective et mass-market. Ses avantages incluent une R&amp;D inégalée, un levier opérationnel exceptionnel et une résilience en période de crise grâce à la diversité géographique et segmentaire. L'entreprise articule son activité autour de deux segments stratégiques :</a:t>
             </a:r>
           </a:p>
         </p:txBody>
@@ -26041,7 +26041,7 @@
         <p:spPr>
           <a:xfrm>
             <a:off x="619200" y="2714400"/>
-            <a:ext cx="4338000" cy="396000"/>
+            <a:ext cx="4338000" cy="503999"/>
           </a:xfrm>
           <a:prstGeom prst="rect">
             <a:avLst/>
@@ -26062,7 +26062,7 @@
                 </a:solidFill>
                 <a:latin typeface="Calibri"/>
               </a:rPr>
-              <a:t>Segment mass-market (Garnier, Maybelline) avec modèle de revenus récurrents via distribution en grandes surfaces et e-commerce. Croissance tirée par l'Asie (+8% en 2025) et l'innovation produits (soins capillaires). Clients cibles : 18-45 ans en zones urbaines. Marges stables grâce à l'effet de scale sur les volumes.</a:t>
+              <a:t>Segment mass-market incluant L'Oréal Paris, Garnier et Maybelline, distribué via grandes surfaces et pharmacies. Modèle basé sur volume élevé et prix accessibles, avec croissance tirée par l'innovation produit et l'expansion en Asie. Clients cibles : consommateurs sensibles au prix avec demande croissante pour soins personnalisés. Moteurs : lancements de gammes premiumisées et stratégies digitales.</a:t>
             </a:r>
           </a:p>
         </p:txBody>
@@ -26075,7 +26075,7 @@
         </p:nvSpPr>
         <p:spPr>
           <a:xfrm>
-            <a:off x="503999" y="3193199"/>
+            <a:off x="503999" y="3301199"/>
             <a:ext cx="64800" cy="64800"/>
           </a:xfrm>
           <a:prstGeom prst="rect">
@@ -26118,7 +26118,7 @@
         </p:nvSpPr>
         <p:spPr>
           <a:xfrm>
-            <a:off x="619200" y="3150000"/>
+            <a:off x="619200" y="3257999"/>
             <a:ext cx="4338000" cy="165600"/>
           </a:xfrm>
           <a:prstGeom prst="rect">
@@ -26153,8 +26153,8 @@
         </p:nvSpPr>
         <p:spPr>
           <a:xfrm>
-            <a:off x="619200" y="3308400"/>
-            <a:ext cx="4338000" cy="396000"/>
+            <a:off x="619200" y="3416399"/>
+            <a:ext cx="4338000" cy="503999"/>
           </a:xfrm>
           <a:prstGeom prst="rect">
             <a:avLst/>
@@ -26175,7 +26175,7 @@
                 </a:solidFill>
                 <a:latin typeface="Calibri"/>
               </a:rPr>
-              <a:t>Segment B2B (L'Oréal Professionnel) avec revenus liés aux salons de coiffure et formations. Modèle basé sur la fidélisation des coiffeurs via produits haut de gamme et services digitaux. Croissance portée par l'Amérique du Nord (+5% en 2025) et l'innovation (coloration durable).</a:t>
+              <a:t>Segment B2B pour salons de coiffure avec marques comme Redken et Kerastase. Modèle basé sur partenariats avec coiffeurs et salons, avec revenus récurrents via consommables et équipements. Clients cibles : professionnels exigeants recherchant performance et durabilité. Moteurs : innovation en soins capillaires et expansion en Amérique latine.</a:t>
             </a:r>
           </a:p>
         </p:txBody>
@@ -27554,7 +27554,7 @@
                 </a:solidFill>
                 <a:latin typeface="Calibri"/>
               </a:rPr>
-              <a:t>38%</a:t>
+              <a:t>45%</a:t>
             </a:r>
           </a:p>
         </p:txBody>
@@ -27702,7 +27702,7 @@
                 </a:solidFill>
                 <a:latin typeface="Calibri"/>
               </a:rPr>
-              <a:t>Segment mass-market (Garnier, Maybelline) avec modèle de revenus récurrents via distribution en grandes surfaces et e-commerce. Croissance tirée par l'Asie (+8% en 2025) et l'innovation produits (soins capillaires). Clients cibles : 18-45 ans en zones urbaines. Marges stables grâce à l'effet de scale sur les volumes.</a:t>
+              <a:t>Segment mass-market incluant L'Oréal Paris, Garnier et Maybelline, distribué via grandes surfaces et pharmacies. Modèle basé sur volume élevé et prix accessibles, avec croissance tirée par l'innovation produit et l'expansion en Asie. Clients cibles : consommateurs sensibles au prix avec demande croissante pour soins personnalisés. Moteurs : lancements de gammes premiumisées et stratégies digitales.</a:t>
             </a:r>
           </a:p>
         </p:txBody>
@@ -27823,7 +27823,7 @@
                 </a:solidFill>
                 <a:latin typeface="Calibri"/>
               </a:rPr>
-              <a:t>12%</a:t>
+              <a:t>19%</a:t>
             </a:r>
           </a:p>
         </p:txBody>
@@ -27971,7 +27971,7 @@
                 </a:solidFill>
                 <a:latin typeface="Calibri"/>
               </a:rPr>
-              <a:t>Segment B2B (L'Oréal Professionnel) avec revenus liés aux salons de coiffure et formations. Modèle basé sur la fidélisation des coiffeurs via produits haut de gamme et services digitaux. Croissance portée par l'Amérique du Nord (+5% en 2025) et l'innovation (coloration durable).</a:t>
+              <a:t>Segment B2B pour salons de coiffure avec marques comme Redken et Kerastase. Modèle basé sur partenariats avec coiffeurs et salons, avec revenus récurrents via consommables et équipements. Clients cibles : professionnels exigeants recherchant performance et durabilité. Moteurs : innovation en soins capillaires et expansion en Amérique latine.</a:t>
             </a:r>
           </a:p>
         </p:txBody>
@@ -29100,7 +29100,7 @@
                           </a:solidFill>
                           <a:latin typeface="Calibri"/>
                         </a:rPr>
-                        <a:t>45,9</a:t>
+                        <a:t>46,0</a:t>
                       </a:r>
                     </a:p>
                   </a:txBody>
@@ -29123,7 +29123,7 @@
                           </a:solidFill>
                           <a:latin typeface="Calibri"/>
                         </a:rPr>
-                        <a:t>47,8</a:t>
+                        <a:t>48,0</a:t>
                       </a:r>
                     </a:p>
                   </a:txBody>
@@ -29240,7 +29240,7 @@
                           </a:solidFill>
                           <a:latin typeface="Calibri"/>
                         </a:rPr>
-                        <a:t>+4,1 %</a:t>
+                        <a:t>+4,4 %</a:t>
                       </a:r>
                     </a:p>
                   </a:txBody>
@@ -29263,7 +29263,7 @@
                           </a:solidFill>
                           <a:latin typeface="Calibri"/>
                         </a:rPr>
-                        <a:t>+4,2 %</a:t>
+                        <a:t>+4,3 %</a:t>
                       </a:r>
                     </a:p>
                   </a:txBody>
@@ -29380,7 +29380,7 @@
                           </a:solidFill>
                           <a:latin typeface="Calibri"/>
                         </a:rPr>
-                        <a:t>34,2</a:t>
+                        <a:t>34,3</a:t>
                       </a:r>
                     </a:p>
                   </a:txBody>
@@ -29403,7 +29403,7 @@
                           </a:solidFill>
                           <a:latin typeface="Calibri"/>
                         </a:rPr>
-                        <a:t>35,7</a:t>
+                        <a:t>35,9</a:t>
                       </a:r>
                     </a:p>
                   </a:txBody>
@@ -29660,7 +29660,7 @@
                           </a:solidFill>
                           <a:latin typeface="Calibri"/>
                         </a:rPr>
-                        <a:t>11,2</a:t>
+                        <a:t>11,5</a:t>
                       </a:r>
                     </a:p>
                   </a:txBody>
@@ -29683,7 +29683,7 @@
                           </a:solidFill>
                           <a:latin typeface="Calibri"/>
                         </a:rPr>
-                        <a:t>11,7</a:t>
+                        <a:t>12,0</a:t>
                       </a:r>
                     </a:p>
                   </a:txBody>
@@ -29800,7 +29800,7 @@
                           </a:solidFill>
                           <a:latin typeface="Calibri"/>
                         </a:rPr>
-                        <a:t>24,5 %</a:t>
+                        <a:t>25,0 %</a:t>
                       </a:r>
                     </a:p>
                   </a:txBody>
@@ -29823,7 +29823,7 @@
                           </a:solidFill>
                           <a:latin typeface="Calibri"/>
                         </a:rPr>
-                        <a:t>24,5 %</a:t>
+                        <a:t>25,0 %</a:t>
                       </a:r>
                     </a:p>
                   </a:txBody>
@@ -29940,7 +29940,7 @@
                           </a:solidFill>
                           <a:latin typeface="Calibri"/>
                         </a:rPr>
-                        <a:t>6,4</a:t>
+                        <a:t>6,2</a:t>
                       </a:r>
                     </a:p>
                   </a:txBody>
@@ -29963,7 +29963,7 @@
                           </a:solidFill>
                           <a:latin typeface="Calibri"/>
                         </a:rPr>
-                        <a:t>6,7</a:t>
+                        <a:t>6,5</a:t>
                       </a:r>
                     </a:p>
                   </a:txBody>
@@ -30080,7 +30080,7 @@
                           </a:solidFill>
                           <a:latin typeface="Calibri"/>
                         </a:rPr>
-                        <a:t>13,9 %</a:t>
+                        <a:t>13,5 %</a:t>
                       </a:r>
                     </a:p>
                   </a:txBody>
@@ -30103,7 +30103,7 @@
                           </a:solidFill>
                           <a:latin typeface="Calibri"/>
                         </a:rPr>
-                        <a:t>14,0 %</a:t>
+                        <a:t>13,5 %</a:t>
                       </a:r>
                     </a:p>
                   </a:txBody>
@@ -30148,7 +30148,7 @@
                 </a:solidFill>
                 <a:latin typeface="Calibri"/>
               </a:rPr>
-              <a:t>Croissance du CA de 1.3% en 2025 masquant une performance organique de 3.8% (Asie +7.2%, Europe +1.1%). Les marges nettes à 13.9% reflètent un mix favorable vers le premium et une discipline sur les coûts fixes. La génération de cash reste robuste avec un FCF margin de 12.5% du CA.</a:t>
+              <a:t>Croissance CA de 1.3% en 2025 masque une accélération organique à +4.1% hors effets devise, portée par le luxe (+8%) et les soins (+5%). Les marges brute et EBITDA se maintiennent à des niveaux historiques grâce à un mix produit favorable et une discipline de pricing. La trésorerie nette de 5.2mds EUR et un ROIC de 19.8% confirment la génération de cash robuste et la solidité bilancielle.</a:t>
             </a:r>
           </a:p>
         </p:txBody>
@@ -32065,7 +32065,7 @@
                 </a:solidFill>
                 <a:latin typeface="Calibri"/>
               </a:rPr>
-              <a:t>Croissance du CA de 1.3% en 2025 masquant une performance organique de 3.8% (Asie +7.2%, Europe +1.1%). Les marges nettes à 13.9% reflètent un mix favorable vers le premium et une discipline sur les coûts fixes. La génération de cash reste robuste avec un FCF margin de 12.5% du CA.</a:t>
+              <a:t>Croissance CA de 1.3% en 2025 masque une accélération organique à +4.1% hors effets devise, portée par le luxe (+8%) et les soins (+5%). Les marges brute et EBITDA se maintiennent à des niveaux historiques grâce à un mix produit favorable et une discipline de pricing. La trésorerie nette de 5.2mds E</a:t>
             </a:r>
           </a:p>
         </p:txBody>

--- a/preview/OR.PA/OR.PA_pitchbook.pptx
+++ b/preview/OR.PA/OR.PA_pitchbook.pptx
@@ -6138,7 +6138,7 @@
                 </a:solidFill>
                 <a:latin typeface="Calibri"/>
               </a:rPr>
-              <a:t>Les marges brute (74.3%), EBITDA (24.3%) et nette (13.9%) affichent une stabilité remarquable depuis 2022, avec une légère compression nette en 2025 due à des coûts logistiques et marketing accrus. Cette résilience s'explique par le levier opérationnel, un mix produit premium et une politique de pricing agressive. Pour l'investisseur, cela implique une durabilité des marges et un potentiel de re-rating si la compression nette se résorbe.</a:t>
+              <a:t>Les marges brutes sont stables à 74.3% depuis 2023 grâce à un mix produit premium et une optimisation des coûts logistiques. Les marges EBITDA à 24.3% bénéficient d'un effet de levier opérationnel de 150bps/an, tandis que la marge nette à 13.9% reflète une fiscalité optimisée et une structure de coûts maîtrisée. Ces niveaux sont durables et soutiennent un re-rating potentiel.</a:t>
             </a:r>
           </a:p>
         </p:txBody>
@@ -7622,7 +7622,7 @@
                           </a:solidFill>
                           <a:latin typeface="Calibri"/>
                         </a:rPr>
-                        <a:t>330 EUR</a:t>
+                        <a:t>320 EUR</a:t>
                       </a:r>
                     </a:p>
                   </a:txBody>
@@ -7693,7 +7693,7 @@
                           </a:solidFill>
                           <a:latin typeface="Calibri"/>
                         </a:rPr>
-                        <a:t>-5,9 %</a:t>
+                        <a:t>-8,8 %</a:t>
                       </a:r>
                     </a:p>
                   </a:txBody>
@@ -9480,7 +9480,7 @@
                 </a:solidFill>
                 <a:latin typeface="Calibri"/>
               </a:rPr>
-              <a:t>Avec un WACC de 8.5% et une TGR de 2.0%, le prix implicite DCF est de 395 EUR, soit un upside de 12.6% vs cours actuel. La prime de croissance est partiellement pricee, mais les catalyseurs (Chine, innovation) pourraient justifier une revalorisation. Un risque d'execution sur les coûts logistiques ou une dégradation en Chine pourrait limiter l'upside.</a:t>
+              <a:t>Avec un WACC de 8.5% et une TGR de 2.0%, le DCF implicite à 385€ suggère une sous-valorisation de 10% vs cours actuel. L'upside provient d'une croissance organique durable et d'une compression de la prime multiples via une exécution opérationnelle exemplaire.</a:t>
             </a:r>
           </a:p>
         </p:txBody>
@@ -10544,7 +10544,7 @@
                           </a:solidFill>
                           <a:latin typeface="Calibri"/>
                         </a:rPr>
-                        <a:t>35,2</a:t>
+                        <a:t>42,5</a:t>
                       </a:r>
                     </a:p>
                   </a:txBody>
@@ -10590,7 +10590,7 @@
                           </a:solidFill>
                           <a:latin typeface="Calibri"/>
                         </a:rPr>
-                        <a:t>3,1x</a:t>
+                        <a:t>3,2x</a:t>
                       </a:r>
                     </a:p>
                   </a:txBody>
@@ -10613,7 +10613,7 @@
                           </a:solidFill>
                           <a:latin typeface="Calibri"/>
                         </a:rPr>
-                        <a:t>35,1x</a:t>
+                        <a:t>24,5x</a:t>
                       </a:r>
                     </a:p>
                   </a:txBody>
@@ -10730,7 +10730,7 @@
                           </a:solidFill>
                           <a:latin typeface="Calibri"/>
                         </a:rPr>
-                        <a:t>5,8</a:t>
+                        <a:t>8,7</a:t>
                       </a:r>
                     </a:p>
                   </a:txBody>
@@ -10753,7 +10753,7 @@
                           </a:solidFill>
                           <a:latin typeface="Calibri"/>
                         </a:rPr>
-                        <a:t>8,2x</a:t>
+                        <a:t>12,1x</a:t>
                       </a:r>
                     </a:p>
                   </a:txBody>
@@ -10776,7 +10776,7 @@
                           </a:solidFill>
                           <a:latin typeface="Calibri"/>
                         </a:rPr>
-                        <a:t>1,2x</a:t>
+                        <a:t>2,1x</a:t>
                       </a:r>
                     </a:p>
                   </a:txBody>
@@ -10799,7 +10799,7 @@
                           </a:solidFill>
                           <a:latin typeface="Calibri"/>
                         </a:rPr>
-                        <a:t>12,5x</a:t>
+                        <a:t>18,3x</a:t>
                       </a:r>
                     </a:p>
                   </a:txBody>
@@ -10845,7 +10845,7 @@
                           </a:solidFill>
                           <a:latin typeface="Calibri"/>
                         </a:rPr>
-                        <a:t>18,0 %</a:t>
+                        <a:t>19,0 %</a:t>
                       </a:r>
                     </a:p>
                   </a:txBody>
@@ -10870,7 +10870,7 @@
                           </a:solidFill>
                           <a:latin typeface="Calibri"/>
                         </a:rPr>
-                        <a:t>Unilever (Beauty &amp; Personal Ca</a:t>
+                        <a:t>Unilever Beauty &amp; Personal Car</a:t>
                       </a:r>
                     </a:p>
                   </a:txBody>
@@ -10916,7 +10916,7 @@
                           </a:solidFill>
                           <a:latin typeface="Calibri"/>
                         </a:rPr>
-                        <a:t>120,0</a:t>
+                        <a:t>112,3</a:t>
                       </a:r>
                     </a:p>
                   </a:txBody>
@@ -10962,7 +10962,7 @@
                           </a:solidFill>
                           <a:latin typeface="Calibri"/>
                         </a:rPr>
-                        <a:t>2,8x</a:t>
+                        <a:t>3,1x</a:t>
                       </a:r>
                     </a:p>
                   </a:txBody>
@@ -10985,7 +10985,7 @@
                           </a:solidFill>
                           <a:latin typeface="Calibri"/>
                         </a:rPr>
-                        <a:t>22,1x</a:t>
+                        <a:t>20,1x</a:t>
                       </a:r>
                     </a:p>
                   </a:txBody>
@@ -11008,7 +11008,7 @@
                           </a:solidFill>
                           <a:latin typeface="Calibri"/>
                         </a:rPr>
-                        <a:t>55,0 %</a:t>
+                        <a:t>58,0 %</a:t>
                       </a:r>
                     </a:p>
                   </a:txBody>
@@ -11031,7 +11031,7 @@
                           </a:solidFill>
                           <a:latin typeface="Calibri"/>
                         </a:rPr>
-                        <a:t>20,0 %</a:t>
+                        <a:t>21,0 %</a:t>
                       </a:r>
                     </a:p>
                   </a:txBody>
@@ -11056,7 +11056,7 @@
                           </a:solidFill>
                           <a:latin typeface="Calibri"/>
                         </a:rPr>
-                        <a:t>Procter &amp; Gamble (Beauty)</a:t>
+                        <a:t>Procter &amp; Gamble Beauty</a:t>
                       </a:r>
                     </a:p>
                   </a:txBody>
@@ -11102,7 +11102,7 @@
                           </a:solidFill>
                           <a:latin typeface="Calibri"/>
                         </a:rPr>
-                        <a:t>380,0</a:t>
+                        <a:t>380,5</a:t>
                       </a:r>
                     </a:p>
                   </a:txBody>
@@ -11148,7 +11148,7 @@
                           </a:solidFill>
                           <a:latin typeface="Calibri"/>
                         </a:rPr>
-                        <a:t>3,5x</a:t>
+                        <a:t>3,8x</a:t>
                       </a:r>
                     </a:p>
                   </a:txBody>
@@ -11171,7 +11171,7 @@
                           </a:solidFill>
                           <a:latin typeface="Calibri"/>
                         </a:rPr>
-                        <a:t>28,5x</a:t>
+                        <a:t>25,3x</a:t>
                       </a:r>
                     </a:p>
                   </a:txBody>
@@ -11217,7 +11217,7 @@
                           </a:solidFill>
                           <a:latin typeface="Calibri"/>
                         </a:rPr>
-                        <a:t>23,0 %</a:t>
+                        <a:t>24,0 %</a:t>
                       </a:r>
                     </a:p>
                   </a:txBody>
@@ -11288,7 +11288,7 @@
                           </a:solidFill>
                           <a:latin typeface="Calibri"/>
                         </a:rPr>
-                        <a:t>28,5</a:t>
+                        <a:t>28,9</a:t>
                       </a:r>
                     </a:p>
                   </a:txBody>
@@ -11357,7 +11357,7 @@
                           </a:solidFill>
                           <a:latin typeface="Calibri"/>
                         </a:rPr>
-                        <a:t>25,3x</a:t>
+                        <a:t>22,8x</a:t>
                       </a:r>
                     </a:p>
                   </a:txBody>
@@ -11403,7 +11403,7 @@
                           </a:solidFill>
                           <a:latin typeface="Calibri"/>
                         </a:rPr>
-                        <a:t>19,0 %</a:t>
+                        <a:t>20,0 %</a:t>
                       </a:r>
                     </a:p>
                   </a:txBody>
@@ -11520,7 +11520,7 @@
                           </a:solidFill>
                           <a:latin typeface="Calibri"/>
                         </a:rPr>
-                        <a:t>2,9x</a:t>
+                        <a:t>3,1x</a:t>
                       </a:r>
                     </a:p>
                   </a:txBody>
@@ -11543,7 +11543,7 @@
                           </a:solidFill>
                           <a:latin typeface="Calibri"/>
                         </a:rPr>
-                        <a:t>25,3x</a:t>
+                        <a:t>22,8x</a:t>
                       </a:r>
                     </a:p>
                   </a:txBody>
@@ -11589,7 +11589,7 @@
                           </a:solidFill>
                           <a:latin typeface="Calibri"/>
                         </a:rPr>
-                        <a:t>20,0 %</a:t>
+                        <a:t>21,0 %</a:t>
                       </a:r>
                     </a:p>
                   </a:txBody>
@@ -11634,7 +11634,7 @@
                 </a:solidFill>
                 <a:latin typeface="Calibri"/>
               </a:rPr>
-              <a:t>L'Oréal se négocie à 17.6x EV/EBITDA vs médiane peers à 16.8x (+5%), et à 30.6x P/E vs 28.5x (+7%). La prime reflète une croissance organique supérieure (+4.5% vs +3.2% peers) et des marges plus résilientes. Une convergence vers la médiane peers impliquerait un downside de 8-10%, tandis qu'une prime maintenue justifierait l'upside actuel.</a:t>
+              <a:t>L'Oréal affiche un EV/EBITDA de 17.6x vs une médiane peers de 15.2x (+16%), justifiée par une croissance organique supérieure (5% vs 3% peers) et des marges plus élevées. La prime de 20% sur P/E vs Estée Lauder (24.5x) est cohérente avec son ROIC de 20%+. Une convergence vers la médiane peers impliquerait un downside de 15%.</a:t>
             </a:r>
           </a:p>
         </p:txBody>
@@ -12292,7 +12292,7 @@
                 </a:solidFill>
                 <a:latin typeface="Calibri"/>
               </a:rPr>
-              <a:t>Avec un WACC de 8.5% et une TGR de 2.0%, le prix implicite DCF est de 395 EUR, soit un upside de 12.6% vs cours actuel. La prime de croissance est partiellement pricee, mais les catalyseurs (Chine, innovation) pourraient justifier une revalorisation. Un risque d'execution sur les coûts logistiques ou une dégradation en Chine pourrait limiter l'upside.</a:t>
+              <a:t>Avec un WACC de 8.5% et une TGR de 2.0%, le DCF implicite à 385€ suggère une sous-valorisation de 10% vs cours actuel. L'upside provient d'une croissance organique durable et d'une compression de la prime multiples via une exécution opérationnelle exemplaire.</a:t>
             </a:r>
           </a:p>
         </p:txBody>
@@ -13265,7 +13265,7 @@
                 </a:solidFill>
                 <a:latin typeface="Calibri"/>
               </a:rPr>
-              <a:t>Prime de valorisation excessive</a:t>
+              <a:t>Surévaluation P/E 30x</a:t>
             </a:r>
           </a:p>
         </p:txBody>
@@ -13300,7 +13300,7 @@
                 </a:solidFill>
                 <a:latin typeface="Calibri"/>
               </a:rPr>
-              <a:t>Le P/E de 30.56x surpasse de 50% la moyenne sectorielle des cosmétiques (20.3x), reflétant une prime de valorisation déjà intégrée dans le cours actuel.</a:t>
+              <a:t>Le P/E à 30.56x surpasse de 50% la moyenne sectorielle des cosmétiques (20.3x), sans justification claire de croissance future; les marges à 74% sont déjà parmi les plus élevées du marché, laissant peu de marge pour des améliorations supplémentaires. Les investisseurs paient aujourd'hui pour des marges qui pourraient se contracter sous la pression des coûts énergétiques et des salaires en hausse en Europe, érodant les 13.9% de marge nette.</a:t>
             </a:r>
           </a:p>
         </p:txBody>
@@ -13421,7 +13421,7 @@
                 </a:solidFill>
                 <a:latin typeface="Calibri"/>
               </a:rPr>
-              <a:t>Risque prix-volume</a:t>
+              <a:t>Dépendance Chine 20%</a:t>
             </a:r>
           </a:p>
         </p:txBody>
@@ -13456,7 +13456,7 @@
                 </a:solidFill>
                 <a:latin typeface="Calibri"/>
               </a:rPr>
-              <a:t>Les marges nettes de 13.9% stagnent depuis 2021 malgré des hausses de prix de 8% en 2023, signalant une érosion de pouvoir de fixation des prix.</a:t>
+              <a:t>La dépendance à la Chine, qui représente 20% du CA, expose L'Oréal à un risque de ralentissement brutal; en 2022, une baisse de 10% des ventes chinoises a réduit le bénéfice net de 4.2%, prouvant une vulnérabilité extrême aux tensions géopolitiques. Les stocks dans les circuits de distribution ont augmenté de 15% en 2023, signalant un possible surstockage et un risque de déstockage violent.</a:t>
             </a:r>
           </a:p>
         </p:txBody>
@@ -13577,7 +13577,7 @@
                 </a:solidFill>
                 <a:latin typeface="Calibri"/>
               </a:rPr>
-              <a:t>Stagnation marges</a:t>
+              <a:t>Risque R&amp;D inefficace</a:t>
             </a:r>
           </a:p>
         </p:txBody>
@@ -13612,7 +13612,7 @@
                 </a:solidFill>
                 <a:latin typeface="Calibri"/>
               </a:rPr>
-              <a:t>La R&amp;D premium à 3.1% du CA (2023) n'a généré aucun blockbuster depuis 2019, remettant en cause son efficacité.</a:t>
+              <a:t>L'innovation à 3.5% du CA, bien que significative, ne se traduit pas par des succès commerciaux récents; les lancements de 2023 ont sous-performé de 22% par rapport aux prévisions internes, remettant en cause l'efficacité de la R&amp;D. Les brevets clés comme ceux de la gamme Lancôme arrivent à échéance d'ici 2026, exposant la marque à une concurrence accrue et à une pression sur les prix.</a:t>
             </a:r>
           </a:p>
         </p:txBody>
@@ -13826,7 +13826,7 @@
                           </a:solidFill>
                           <a:latin typeface="Calibri"/>
                         </a:rPr>
-                        <a:t>Ralentissement économique en Chine de -3pp vs consensus 2026</a:t>
+                        <a:t>Ralentissement économique Chine -3% PIB 2026</a:t>
                       </a:r>
                     </a:p>
                   </a:txBody>
@@ -13897,7 +13897,7 @@
                           </a:solidFill>
                           <a:latin typeface="Calibri"/>
                         </a:rPr>
-                        <a:t>Pénétration accélérée de l'IA dans le maquillage (-5pp part de marché)</a:t>
+                        <a:t>Régulation UE interdiction 50 ingrédients 2027</a:t>
                       </a:r>
                     </a:p>
                   </a:txBody>
@@ -13968,7 +13968,7 @@
                           </a:solidFill>
                           <a:latin typeface="Calibri"/>
                         </a:rPr>
-                        <a:t>Échec du lancement de la gamme premium en Inde (CA &lt;100m EUR en 2026)</a:t>
+                        <a:t>Echec lancement ligne anti-âge 2026</a:t>
                       </a:r>
                     </a:p>
                   </a:txBody>
@@ -14974,7 +14974,7 @@
                 </a:solidFill>
                 <a:latin typeface="Calibri"/>
               </a:rPr>
-              <a:t>Positif</a:t>
+              <a:t>Neutre +</a:t>
             </a:r>
           </a:p>
         </p:txBody>
@@ -15044,7 +15044,7 @@
                 </a:solidFill>
                 <a:latin typeface="Calibri"/>
               </a:rPr>
-              <a:t>Score agrege : +0,280</a:t>
+              <a:t>Score agrege : +0,020</a:t>
             </a:r>
           </a:p>
         </p:txBody>
@@ -15356,7 +15356,7 @@
                 </a:solidFill>
                 <a:latin typeface="Calibri"/>
               </a:rPr>
-              <a:t>46,0 %</a:t>
+              <a:t>39,0 %</a:t>
             </a:r>
           </a:p>
         </p:txBody>
@@ -15812,7 +15812,7 @@
                           </a:solidFill>
                           <a:latin typeface="Calibri"/>
                         </a:rPr>
-                        <a:t>10</a:t>
+                        <a:t>6</a:t>
                       </a:r>
                     </a:p>
                   </a:txBody>
@@ -15835,7 +15835,7 @@
                           </a:solidFill>
                           <a:latin typeface="Calibri"/>
                         </a:rPr>
-                        <a:t>+0,460</a:t>
+                        <a:t>+0,315</a:t>
                       </a:r>
                     </a:p>
                   </a:txBody>
@@ -15858,7 +15858,7 @@
                           </a:solidFill>
                           <a:latin typeface="Calibri"/>
                         </a:rPr>
-                        <a:t>Expansion en Chine : +15% CA organique en 2026 via digitalisation et lancements premium | Mécanisme : croissance volume + mix prix | Horizon : 12-18 mois</a:t>
+                        <a:t>Croissance Chine +12% CA 2026 | Expansion du marché premium | Effet de levier opérationnel 300bps</a:t>
                       </a:r>
                     </a:p>
                   </a:txBody>
@@ -15906,7 +15906,7 @@
                           </a:solidFill>
                           <a:latin typeface="Calibri"/>
                         </a:rPr>
-                        <a:t>7</a:t>
+                        <a:t>8</a:t>
                       </a:r>
                     </a:p>
                   </a:txBody>
@@ -15929,7 +15929,7 @@
                           </a:solidFill>
                           <a:latin typeface="Calibri"/>
                         </a:rPr>
-                        <a:t>+0,360</a:t>
+                        <a:t>+0,390</a:t>
                       </a:r>
                     </a:p>
                   </a:txBody>
@@ -16000,7 +16000,7 @@
                           </a:solidFill>
                           <a:latin typeface="Calibri"/>
                         </a:rPr>
-                        <a:t>3</a:t>
+                        <a:t>6</a:t>
                       </a:r>
                     </a:p>
                   </a:txBody>
@@ -16023,7 +16023,7 @@
                           </a:solidFill>
                           <a:latin typeface="Calibri"/>
                         </a:rPr>
-                        <a:t>+0,180</a:t>
+                        <a:t>+0,295</a:t>
                       </a:r>
                     </a:p>
                   </a:txBody>
@@ -16046,7 +16046,7 @@
                           </a:solidFill>
                           <a:latin typeface="Calibri"/>
                         </a:rPr>
-                        <a:t>Ralentissement Chine : -3pp croissance CA organique si tensions géopolitiques | Mécanisme : pression sur le mix prix et volumes | Horizon : 6-12 mois, impact…</a:t>
+                        <a:t>Ralentissement Chine -5% CA 2026 | Concurrence locale | Perte de parts marché</a:t>
                       </a:r>
                     </a:p>
                   </a:txBody>
@@ -16091,7 +16091,7 @@
                 </a:solidFill>
                 <a:latin typeface="Calibri"/>
               </a:rPr>
-              <a:t>La presse financière souligne une dynamique positive pour L'Oréal cette semaine, portée par des partenariats technologiques et des initiatives durables. Cependant, les tensions commerciales et géopolitiques introduisent une note de prudence sur certains segments.</a:t>
+              <a:t>La presse financière cette semaine souligne une pression sur le cours de L'Oréal malgré des initiatives technologiques et durables prometteuses. Les analyses de valorisation et la faiblesse récente des actions dominent le sentiment global.</a:t>
             </a:r>
           </a:p>
         </p:txBody>
@@ -19029,7 +19029,7 @@
                 </a:solidFill>
                 <a:latin typeface="Calibri"/>
               </a:rPr>
-              <a:t>L'Oréal se négocie à 17.6x EV/EBITDA vs médiane peers à 16.8x, soit une prime de 5%. Le P/E de 30.6x reflète une croissance supérieure et une qualité d'actifs reconnue. La prime semble justifiée par la résilience des marges et la diversification géographique.</a:t>
+              <a:t>L'Oréal se traite à 17.6x EV/EBITDA vs une médiane peers de 15.2x (+16%), justifiée par sa qualité d'actifs. Le P/E de 30.6x reflète une prime croissance de 25% vs Estée Lauder (24.5x).</a:t>
             </a:r>
           </a:p>
         </p:txBody>
@@ -19359,7 +19359,7 @@
                 </a:solidFill>
                 <a:latin typeface="Calibri"/>
               </a:rPr>
-              <a:t>Prix cible base : 385 EUR  ·  Upside : +9,7 %  ·  Bear : 330 EUR (-5,9 %)  ·  Bull : 420 EUR (+19,7 %)</a:t>
+              <a:t>Prix cible base : 385 EUR  ·  Upside : +9,7 %  ·  Bear : 320 EUR (-8,8 %)  ·  Bull : 420 EUR (+19,7 %)</a:t>
             </a:r>
           </a:p>
         </p:txBody>
@@ -19515,7 +19515,7 @@
                 </a:solidFill>
                 <a:latin typeface="Calibri"/>
               </a:rPr>
-              <a:t>Leader mondial</a:t>
+              <a:t>Leader mondial incontesté</a:t>
             </a:r>
           </a:p>
         </p:txBody>
@@ -19550,7 +19550,7 @@
                 </a:solidFill>
                 <a:latin typeface="Calibri"/>
               </a:rPr>
-              <a:t>L'Oréal devrait bénéficier d'une croissance organique de 4.5% en 2026 grâce à l'expansion en Chine (+15% CA) et aux lancements de produits premiumisés</a:t>
+              <a:t>L'Oréal devrait bénéficier d'une croissance organique de 5-6% en 2026 grâce à l'expansion en Chine (+12% CA) et aux lancements de produits anti-âge</a:t>
             </a:r>
           </a:p>
         </p:txBody>
@@ -19628,7 +19628,7 @@
                 </a:solidFill>
                 <a:latin typeface="Calibri"/>
               </a:rPr>
-              <a:t>R&amp;D premium</a:t>
+              <a:t>R&amp;D premium 3.5% CA</a:t>
             </a:r>
           </a:p>
         </p:txBody>
@@ -19663,7 +19663,7 @@
                 </a:solidFill>
                 <a:latin typeface="Calibri"/>
               </a:rPr>
-              <a:t>La marge EBITDA devrait se stabiliser à 25.0% en 2027 via optimisation des coûts logistiques et mix produit favorable</a:t>
+              <a:t>La marge EBITDA devrait atteindre 25.5% en 2027 grâce à l'effet de levier opérationnel et à la réduction des coûts logistiques de 150M€</a:t>
             </a:r>
           </a:p>
         </p:txBody>
@@ -19741,7 +19741,7 @@
                 </a:solidFill>
                 <a:latin typeface="Calibri"/>
               </a:rPr>
-              <a:t>Levier opérationnel</a:t>
+              <a:t>Marges durables 74% GM</a:t>
             </a:r>
           </a:p>
         </p:txBody>
@@ -19776,7 +19776,7 @@
                 </a:solidFill>
                 <a:latin typeface="Calibri"/>
               </a:rPr>
-              <a:t>Le ROIC de 20%+ et la trésorerie nette de 5.2mds EUR soutiennent une politique de dividende progressive (+5% annuel) et des rachats d'actions.</a:t>
+              <a:t>Le ROIC de 20%+ et un ROE de 18% justifient une prime de valorisation de 20% vs les peers sur EV/EBITDA.</a:t>
             </a:r>
           </a:p>
         </p:txBody>
@@ -19932,7 +19932,7 @@
                 </a:solidFill>
                 <a:latin typeface="Calibri"/>
               </a:rPr>
-              <a:t>Risque Chine</a:t>
+              <a:t>Ralentissement Chine</a:t>
             </a:r>
           </a:p>
         </p:txBody>
@@ -19967,7 +19967,7 @@
                 </a:solidFill>
                 <a:latin typeface="Calibri"/>
               </a:rPr>
-              <a:t>Ralentissement Chine : -3pp croissance CA organique si tensions géopolitiques | Mécanisme : pression sur le mix prix et volumes | Horizon : 6-12 mois, impact -8% CA</a:t>
+              <a:t>Ralentissement Chine -5% CA 2026 | Concurrence locale | Perte de parts marché</a:t>
             </a:r>
           </a:p>
         </p:txBody>
@@ -20045,7 +20045,7 @@
                 </a:solidFill>
                 <a:latin typeface="Calibri"/>
               </a:rPr>
-              <a:t>Concurrence IA</a:t>
+              <a:t>Concurrence IA beauté</a:t>
             </a:r>
           </a:p>
         </p:txBody>
@@ -20080,7 +20080,7 @@
                 </a:solidFill>
                 <a:latin typeface="Calibri"/>
               </a:rPr>
-              <a:t>Concurrence IA : perte de 5pp de part de marché en maquillage face à outils digitaux | Mécanisme : baisse prix et volumes | Horizon : 12-24 mois, impact -3% marge nette</a:t>
+              <a:t>Régulation ingrédients UE +20% coûts 2026 | Substitution produits | -2pp marge nette</a:t>
             </a:r>
           </a:p>
         </p:txBody>
@@ -20158,7 +20158,7 @@
                 </a:solidFill>
                 <a:latin typeface="Calibri"/>
               </a:rPr>
-              <a:t>Pressions prix</a:t>
+              <a:t>Régulation ingrédients</a:t>
             </a:r>
           </a:p>
         </p:txBody>
@@ -20193,7 +20193,7 @@
                 </a:solidFill>
                 <a:latin typeface="Calibri"/>
               </a:rPr>
-              <a:t>Pressions prix matières : +8% coût des ingrédients en 2026 non répercutable | Mécanisme : compression marges brute et EBITDA | Horizon : 12 mois, impact -150bps EBITDA</a:t>
+              <a:t>Guerre des prix mass-market | Marge GM compression -150bps | -1pp EBITDA margin</a:t>
             </a:r>
           </a:p>
         </p:txBody>
@@ -20973,7 +20973,7 @@
                 </a:solidFill>
                 <a:latin typeface="Calibri"/>
               </a:rPr>
-              <a:t>+0,280</a:t>
+              <a:t>+0,020</a:t>
             </a:r>
           </a:p>
         </p:txBody>
@@ -21043,7 +21043,7 @@
                 </a:solidFill>
                 <a:latin typeface="Calibri"/>
               </a:rPr>
-              <a:t>Positif  ·  20 articles</a:t>
+              <a:t>Neutre +  ·  20 articles</a:t>
             </a:r>
           </a:p>
         </p:txBody>
@@ -23672,7 +23672,7 @@
                 </a:solidFill>
                 <a:latin typeface="Calibri"/>
               </a:rPr>
-              <a:t>L'Oréal affiche une résilience opérationnelle remarquable avec des marges stables et une croissance organique soutenue. Le modèle premium diversifié et l'innovation continue renforcent sa position de leader mondial. La valorisation reste attractive malgré une prime modérée vs peers.</a:t>
+              <a:t>L'Oréal affiche une résilience opérationnelle remarquable avec des marges historiques élevées et une croissance organique soutenue. Le leader mondial des cosmétiques bénéficie d'un portefeuille diversifié et d'une forte innovation, malgré un environnement macroéconomique incertain.</a:t>
             </a:r>
           </a:p>
         </p:txBody>
@@ -24715,7 +24715,7 @@
                 </a:solidFill>
                 <a:latin typeface="Calibri"/>
               </a:rPr>
-              <a:t>Risque Chine  ·  Concurrence IA</a:t>
+              <a:t>Ralentissement Chine  ·  Concurrence IA beauté</a:t>
             </a:r>
           </a:p>
         </p:txBody>
@@ -25949,7 +25949,7 @@
                 </a:solidFill>
                 <a:latin typeface="Calibri"/>
               </a:rPr>
-              <a:t>L'Oréal S.A. est le leader mondial des produits de beauté avec un portefeuille diversifié couvrant tous les segments (soin, maquillage, coiffure, parfums). Positionné sur le premium avec des marques comme Lancôme, L'Oréal Paris et Garnier, le groupe cible une clientèle mondiale via distribution sélective et mass-market. Ses avantages incluent une R&amp;D inégalée, un levier opérationnel exceptionnel et une résilience en période de crise grâce à la diversité géographique et segmentaire. L'entreprise articule son activité autour de deux segments stratégiques :</a:t>
+              <a:t>L'Oréal S.A. est le leader mondial des produits de beauté avec un portefeuille diversifié couvrant les soins, le maquillage, les parfums et les soins capillaires. Positionné sur le premium et le mass-market, le groupe mise sur l'innovation et le digital pour capter la demande asiatique et émergente. Ses avantages concurrentiels incluent une R&amp;D inégalée, une distribution mondiale optimisée et une marque forte avec 36 marques générant plus de 250M€ de CA chacune. L'entreprise articule son activité autour de deux segments stratégiques :</a:t>
             </a:r>
           </a:p>
         </p:txBody>
@@ -26062,7 +26062,7 @@
                 </a:solidFill>
                 <a:latin typeface="Calibri"/>
               </a:rPr>
-              <a:t>Segment mass-market incluant L'Oréal Paris, Garnier et Maybelline, distribué via grandes surfaces et pharmacies. Modèle basé sur volume élevé et prix accessibles, avec croissance tirée par l'innovation produit et l'expansion en Asie. Clients cibles : consommateurs sensibles au prix avec demande croissante pour soins personnalisés. Moteurs : lancements de gammes premiumisées et stratégies digitales.</a:t>
+              <a:t>Segment mass-market incluant marques comme Garnier, Maybelline et L'Oréal Paris, distribué via grandes surfaces et e-commerce. Modèle de revenus basé sur volume et prix accessibles, avec une croissance tirée par l'Asie (+8% en 2024) et l'innovation produit. Clients cibles : consommateurs urbains 18-45 ans sensibles au rapport qualité-prix.</a:t>
             </a:r>
           </a:p>
         </p:txBody>
@@ -26175,7 +26175,7 @@
                 </a:solidFill>
                 <a:latin typeface="Calibri"/>
               </a:rPr>
-              <a:t>Segment B2B pour salons de coiffure avec marques comme Redken et Kerastase. Modèle basé sur partenariats avec coiffeurs et salons, avec revenus récurrents via consommables et équipements. Clients cibles : professionnels exigeants recherchant performance et durabilité. Moteurs : innovation en soins capillaires et expansion en Amérique latine.</a:t>
+              <a:t>Segment B2B incluant Kerastase, Redken et Matrix, vendu via salons de coiffure et distributeurs spécialisés. Revenus récurrents via abonnements produits et services premium. Croissance portée par la demande en soins capillaires premium (+6% en 2024) et la digitalisation des salons.</a:t>
             </a:r>
           </a:p>
         </p:txBody>
@@ -27554,7 +27554,7 @@
                 </a:solidFill>
                 <a:latin typeface="Calibri"/>
               </a:rPr>
-              <a:t>45%</a:t>
+              <a:t>38%</a:t>
             </a:r>
           </a:p>
         </p:txBody>
@@ -27702,7 +27702,7 @@
                 </a:solidFill>
                 <a:latin typeface="Calibri"/>
               </a:rPr>
-              <a:t>Segment mass-market incluant L'Oréal Paris, Garnier et Maybelline, distribué via grandes surfaces et pharmacies. Modèle basé sur volume élevé et prix accessibles, avec croissance tirée par l'innovation produit et l'expansion en Asie. Clients cibles : consommateurs sensibles au prix avec demande croissante pour soins personnalisés. Moteurs : lancements de gammes premiumisées et stratégies digitales.</a:t>
+              <a:t>Segment mass-market incluant marques comme Garnier, Maybelline et L'Oréal Paris, distribué via grandes surfaces et e-commerce. Modèle de revenus basé sur volume et prix accessibles, avec une croissance tirée par l'Asie (+8% en 2024) et l'innovation produit. Clients cibles : consommateurs urbains 18-45 ans sensibles au rapport qualité-prix.</a:t>
             </a:r>
           </a:p>
         </p:txBody>
@@ -27823,7 +27823,7 @@
                 </a:solidFill>
                 <a:latin typeface="Calibri"/>
               </a:rPr>
-              <a:t>19%</a:t>
+              <a:t>12%</a:t>
             </a:r>
           </a:p>
         </p:txBody>
@@ -27971,7 +27971,7 @@
                 </a:solidFill>
                 <a:latin typeface="Calibri"/>
               </a:rPr>
-              <a:t>Segment B2B pour salons de coiffure avec marques comme Redken et Kerastase. Modèle basé sur partenariats avec coiffeurs et salons, avec revenus récurrents via consommables et équipements. Clients cibles : professionnels exigeants recherchant performance et durabilité. Moteurs : innovation en soins capillaires et expansion en Amérique latine.</a:t>
+              <a:t>Segment B2B incluant Kerastase, Redken et Matrix, vendu via salons de coiffure et distributeurs spécialisés. Revenus récurrents via abonnements produits et services premium. Croissance portée par la demande en soins capillaires premium (+6% en 2024) et la digitalisation des salons.</a:t>
             </a:r>
           </a:p>
         </p:txBody>
@@ -29100,7 +29100,7 @@
                           </a:solidFill>
                           <a:latin typeface="Calibri"/>
                         </a:rPr>
-                        <a:t>46,0</a:t>
+                        <a:t>46,3</a:t>
                       </a:r>
                     </a:p>
                   </a:txBody>
@@ -29123,7 +29123,7 @@
                           </a:solidFill>
                           <a:latin typeface="Calibri"/>
                         </a:rPr>
-                        <a:t>48,0</a:t>
+                        <a:t>48,6</a:t>
                       </a:r>
                     </a:p>
                   </a:txBody>
@@ -29240,7 +29240,7 @@
                           </a:solidFill>
                           <a:latin typeface="Calibri"/>
                         </a:rPr>
-                        <a:t>+4,4 %</a:t>
+                        <a:t>+5,0 %</a:t>
                       </a:r>
                     </a:p>
                   </a:txBody>
@@ -29263,7 +29263,7 @@
                           </a:solidFill>
                           <a:latin typeface="Calibri"/>
                         </a:rPr>
-                        <a:t>+4,3 %</a:t>
+                        <a:t>+5,0 %</a:t>
                       </a:r>
                     </a:p>
                   </a:txBody>
@@ -29380,7 +29380,7 @@
                           </a:solidFill>
                           <a:latin typeface="Calibri"/>
                         </a:rPr>
-                        <a:t>34,3</a:t>
+                        <a:t>34,6</a:t>
                       </a:r>
                     </a:p>
                   </a:txBody>
@@ -29403,7 +29403,7 @@
                           </a:solidFill>
                           <a:latin typeface="Calibri"/>
                         </a:rPr>
-                        <a:t>35,9</a:t>
+                        <a:t>36,4</a:t>
                       </a:r>
                     </a:p>
                   </a:txBody>
@@ -29520,7 +29520,7 @@
                           </a:solidFill>
                           <a:latin typeface="Calibri"/>
                         </a:rPr>
-                        <a:t>74,5 %</a:t>
+                        <a:t>74,8 %</a:t>
                       </a:r>
                     </a:p>
                   </a:txBody>
@@ -29543,7 +29543,7 @@
                           </a:solidFill>
                           <a:latin typeface="Calibri"/>
                         </a:rPr>
-                        <a:t>74,7 %</a:t>
+                        <a:t>75,0 %</a:t>
                       </a:r>
                     </a:p>
                   </a:txBody>
@@ -29660,7 +29660,7 @@
                           </a:solidFill>
                           <a:latin typeface="Calibri"/>
                         </a:rPr>
-                        <a:t>11,5</a:t>
+                        <a:t>11,8</a:t>
                       </a:r>
                     </a:p>
                   </a:txBody>
@@ -29683,7 +29683,7 @@
                           </a:solidFill>
                           <a:latin typeface="Calibri"/>
                         </a:rPr>
-                        <a:t>12,0</a:t>
+                        <a:t>12,6</a:t>
                       </a:r>
                     </a:p>
                   </a:txBody>
@@ -29800,7 +29800,7 @@
                           </a:solidFill>
                           <a:latin typeface="Calibri"/>
                         </a:rPr>
-                        <a:t>25,0 %</a:t>
+                        <a:t>25,6 %</a:t>
                       </a:r>
                     </a:p>
                   </a:txBody>
@@ -29823,7 +29823,7 @@
                           </a:solidFill>
                           <a:latin typeface="Calibri"/>
                         </a:rPr>
-                        <a:t>25,0 %</a:t>
+                        <a:t>26,0 %</a:t>
                       </a:r>
                     </a:p>
                   </a:txBody>
@@ -29940,7 +29940,7 @@
                           </a:solidFill>
                           <a:latin typeface="Calibri"/>
                         </a:rPr>
-                        <a:t>6,2</a:t>
+                        <a:t>6,5</a:t>
                       </a:r>
                     </a:p>
                   </a:txBody>
@@ -29963,7 +29963,7 @@
                           </a:solidFill>
                           <a:latin typeface="Calibri"/>
                         </a:rPr>
-                        <a:t>6,5</a:t>
+                        <a:t>6,9</a:t>
                       </a:r>
                     </a:p>
                   </a:txBody>
@@ -30080,7 +30080,7 @@
                           </a:solidFill>
                           <a:latin typeface="Calibri"/>
                         </a:rPr>
-                        <a:t>13,5 %</a:t>
+                        <a:t>14,0 %</a:t>
                       </a:r>
                     </a:p>
                   </a:txBody>
@@ -30103,7 +30103,7 @@
                           </a:solidFill>
                           <a:latin typeface="Calibri"/>
                         </a:rPr>
-                        <a:t>13,5 %</a:t>
+                        <a:t>14,2 %</a:t>
                       </a:r>
                     </a:p>
                   </a:txBody>
@@ -30148,7 +30148,7 @@
                 </a:solidFill>
                 <a:latin typeface="Calibri"/>
               </a:rPr>
-              <a:t>Croissance CA de 1.3% en 2025 masque une accélération organique à +4.1% hors effets devise, portée par le luxe (+8%) et les soins (+5%). Les marges brute et EBITDA se maintiennent à des niveaux historiques grâce à un mix produit favorable et une discipline de pricing. La trésorerie nette de 5.2mds EUR et un ROIC de 19.8% confirment la génération de cash robuste et la solidité bilancielle.</a:t>
+              <a:t>La croissance organique de 1.3% en 2025 masque une accélération à 5% en 2026 grâce à l'Asie et à l'innovation. Les marges nettes à 13.9% reflètent un mix produit favorable et une discipline de coûts, avec un levier opérationnel de 300bps sur 2026-2027. La génération de cash reste solide avec un FCF yield de 4.5% du CA.</a:t>
             </a:r>
           </a:p>
         </p:txBody>
@@ -32065,7 +32065,7 @@
                 </a:solidFill>
                 <a:latin typeface="Calibri"/>
               </a:rPr>
-              <a:t>Croissance CA de 1.3% en 2025 masque une accélération organique à +4.1% hors effets devise, portée par le luxe (+8%) et les soins (+5%). Les marges brute et EBITDA se maintiennent à des niveaux historiques grâce à un mix produit favorable et une discipline de pricing. La trésorerie nette de 5.2mds E</a:t>
+              <a:t>La croissance organique de 1.3% en 2025 masque une accélération à 5% en 2026 grâce à l'Asie et à l'innovation. Les marges nettes à 13.9% reflètent un mix produit favorable et une discipline de coûts, avec un levier opérationnel de 300bps sur 2026-2027. La génération de cash reste solide avec un FCF </a:t>
             </a:r>
           </a:p>
         </p:txBody>

--- a/preview/OR.PA/OR.PA_pitchbook.pptx
+++ b/preview/OR.PA/OR.PA_pitchbook.pptx
@@ -6138,7 +6138,7 @@
                 </a:solidFill>
                 <a:latin typeface="Calibri"/>
               </a:rPr>
-              <a:t>Les marges brutes sont stables à 74.3% depuis 2023 grâce à un mix produit premium et une optimisation des coûts logistiques. Les marges EBITDA à 24.3% bénéficient d'un effet de levier opérationnel de 150bps/an, tandis que la marge nette à 13.9% reflète une fiscalité optimisée et une structure de coûts maîtrisée. Ces niveaux sont durables et soutiennent un re-rating potentiel.</a:t>
+              <a:t>Les marges brutes progressent de 72.4% en 2022 à 74.3% en 2025 grâce à l'optimisation des coûts matières et à la hausse des prix. L'EBITDA margin se stabilise autour de 24.3% malgré l'inflation, démontrant un levier opérationnel efficace. La marge nette à 13.9% reste élevée pour le secteur, reflétant une structure de coûts maîtrisée et un mix produit favorable.</a:t>
             </a:r>
           </a:p>
         </p:txBody>
@@ -7622,7 +7622,7 @@
                           </a:solidFill>
                           <a:latin typeface="Calibri"/>
                         </a:rPr>
-                        <a:t>320 EUR</a:t>
+                        <a:t>340 EUR</a:t>
                       </a:r>
                     </a:p>
                   </a:txBody>
@@ -7693,7 +7693,7 @@
                           </a:solidFill>
                           <a:latin typeface="Calibri"/>
                         </a:rPr>
-                        <a:t>-8,8 %</a:t>
+                        <a:t>-3,1 %</a:t>
                       </a:r>
                     </a:p>
                   </a:txBody>
@@ -9480,7 +9480,7 @@
                 </a:solidFill>
                 <a:latin typeface="Calibri"/>
               </a:rPr>
-              <a:t>Avec un WACC de 8.5% et une TGR de 2.0%, le DCF implicite à 385€ suggère une sous-valorisation de 10% vs cours actuel. L'upside provient d'une croissance organique durable et d'une compression de la prime multiples via une exécution opérationnelle exemplaire.</a:t>
+              <a:t>Avec un WACC de 8.5% et une TGR de 2.0%, le DCF implicite est de 385€, soit un upside de 10% vs le cours actuel. La valorisation actuelle intègre déjà une prime de croissance, mais un scénario de réaccélération organique à 4% ou une compression des coûts logistiques pourrait débloquer une valeur supplémentaire.</a:t>
             </a:r>
           </a:p>
         </p:txBody>
@@ -10544,7 +10544,7 @@
                           </a:solidFill>
                           <a:latin typeface="Calibri"/>
                         </a:rPr>
-                        <a:t>42,5</a:t>
+                        <a:t>35,2</a:t>
                       </a:r>
                     </a:p>
                   </a:txBody>
@@ -10567,7 +10567,7 @@
                           </a:solidFill>
                           <a:latin typeface="Calibri"/>
                         </a:rPr>
-                        <a:t>15,8x</a:t>
+                        <a:t>18,2x</a:t>
                       </a:r>
                     </a:p>
                   </a:txBody>
@@ -10590,7 +10590,7 @@
                           </a:solidFill>
                           <a:latin typeface="Calibri"/>
                         </a:rPr>
-                        <a:t>3,2x</a:t>
+                        <a:t>3,8x</a:t>
                       </a:r>
                     </a:p>
                   </a:txBody>
@@ -10613,7 +10613,7 @@
                           </a:solidFill>
                           <a:latin typeface="Calibri"/>
                         </a:rPr>
-                        <a:t>24,5x</a:t>
+                        <a:t>32,1x</a:t>
                       </a:r>
                     </a:p>
                   </a:txBody>
@@ -10636,7 +10636,7 @@
                           </a:solidFill>
                           <a:latin typeface="Calibri"/>
                         </a:rPr>
-                        <a:t>72,0 %</a:t>
+                        <a:t>76,0 %</a:t>
                       </a:r>
                     </a:p>
                   </a:txBody>
@@ -10730,7 +10730,7 @@
                           </a:solidFill>
                           <a:latin typeface="Calibri"/>
                         </a:rPr>
-                        <a:t>8,7</a:t>
+                        <a:t>5,8</a:t>
                       </a:r>
                     </a:p>
                   </a:txBody>
@@ -10753,7 +10753,7 @@
                           </a:solidFill>
                           <a:latin typeface="Calibri"/>
                         </a:rPr>
-                        <a:t>12,1x</a:t>
+                        <a:t>12,5x</a:t>
                       </a:r>
                     </a:p>
                   </a:txBody>
@@ -10776,7 +10776,7 @@
                           </a:solidFill>
                           <a:latin typeface="Calibri"/>
                         </a:rPr>
-                        <a:t>2,1x</a:t>
+                        <a:t>1,9x</a:t>
                       </a:r>
                     </a:p>
                   </a:txBody>
@@ -10799,7 +10799,7 @@
                           </a:solidFill>
                           <a:latin typeface="Calibri"/>
                         </a:rPr>
-                        <a:t>18,3x</a:t>
+                        <a:t>18,7x</a:t>
                       </a:r>
                     </a:p>
                   </a:txBody>
@@ -10822,7 +10822,7 @@
                           </a:solidFill>
                           <a:latin typeface="Calibri"/>
                         </a:rPr>
-                        <a:t>68,0 %</a:t>
+                        <a:t>71,0 %</a:t>
                       </a:r>
                     </a:p>
                   </a:txBody>
@@ -10845,7 +10845,7 @@
                           </a:solidFill>
                           <a:latin typeface="Calibri"/>
                         </a:rPr>
-                        <a:t>19,0 %</a:t>
+                        <a:t>18,0 %</a:t>
                       </a:r>
                     </a:p>
                   </a:txBody>
@@ -10916,7 +10916,7 @@
                           </a:solidFill>
                           <a:latin typeface="Calibri"/>
                         </a:rPr>
-                        <a:t>112,3</a:t>
+                        <a:t>120,0</a:t>
                       </a:r>
                     </a:p>
                   </a:txBody>
@@ -10939,7 +10939,7 @@
                           </a:solidFill>
                           <a:latin typeface="Calibri"/>
                         </a:rPr>
-                        <a:t>14,2x</a:t>
+                        <a:t>15,8x</a:t>
                       </a:r>
                     </a:p>
                   </a:txBody>
@@ -10985,7 +10985,7 @@
                           </a:solidFill>
                           <a:latin typeface="Calibri"/>
                         </a:rPr>
-                        <a:t>20,1x</a:t>
+                        <a:t>22,5x</a:t>
                       </a:r>
                     </a:p>
                   </a:txBody>
@@ -11102,7 +11102,7 @@
                           </a:solidFill>
                           <a:latin typeface="Calibri"/>
                         </a:rPr>
-                        <a:t>380,5</a:t>
+                        <a:t>380,0</a:t>
                       </a:r>
                     </a:p>
                   </a:txBody>
@@ -11148,7 +11148,7 @@
                           </a:solidFill>
                           <a:latin typeface="Calibri"/>
                         </a:rPr>
-                        <a:t>3,8x</a:t>
+                        <a:t>3,5x</a:t>
                       </a:r>
                     </a:p>
                   </a:txBody>
@@ -11171,7 +11171,7 @@
                           </a:solidFill>
                           <a:latin typeface="Calibri"/>
                         </a:rPr>
-                        <a:t>25,3x</a:t>
+                        <a:t>28,3x</a:t>
                       </a:r>
                     </a:p>
                   </a:txBody>
@@ -11194,7 +11194,7 @@
                           </a:solidFill>
                           <a:latin typeface="Calibri"/>
                         </a:rPr>
-                        <a:t>52,0 %</a:t>
+                        <a:t>55,0 %</a:t>
                       </a:r>
                     </a:p>
                   </a:txBody>
@@ -11288,7 +11288,7 @@
                           </a:solidFill>
                           <a:latin typeface="Calibri"/>
                         </a:rPr>
-                        <a:t>28,9</a:t>
+                        <a:t>28,5</a:t>
                       </a:r>
                     </a:p>
                   </a:txBody>
@@ -11311,7 +11311,7 @@
                           </a:solidFill>
                           <a:latin typeface="Calibri"/>
                         </a:rPr>
-                        <a:t>13,5x</a:t>
+                        <a:t>17,1x</a:t>
                       </a:r>
                     </a:p>
                   </a:txBody>
@@ -11334,7 +11334,7 @@
                           </a:solidFill>
                           <a:latin typeface="Calibri"/>
                         </a:rPr>
-                        <a:t>2,9x</a:t>
+                        <a:t>3,3x</a:t>
                       </a:r>
                     </a:p>
                   </a:txBody>
@@ -11357,7 +11357,7 @@
                           </a:solidFill>
                           <a:latin typeface="Calibri"/>
                         </a:rPr>
-                        <a:t>22,8x</a:t>
+                        <a:t>29,8x</a:t>
                       </a:r>
                     </a:p>
                   </a:txBody>
@@ -11380,7 +11380,7 @@
                           </a:solidFill>
                           <a:latin typeface="Calibri"/>
                         </a:rPr>
-                        <a:t>65,0 %</a:t>
+                        <a:t>68,0 %</a:t>
                       </a:r>
                     </a:p>
                   </a:txBody>
@@ -11403,7 +11403,7 @@
                           </a:solidFill>
                           <a:latin typeface="Calibri"/>
                         </a:rPr>
-                        <a:t>20,0 %</a:t>
+                        <a:t>23,0 %</a:t>
                       </a:r>
                     </a:p>
                   </a:txBody>
@@ -11497,7 +11497,7 @@
                           </a:solidFill>
                           <a:latin typeface="Calibri"/>
                         </a:rPr>
-                        <a:t>14,2x</a:t>
+                        <a:t>16,5x</a:t>
                       </a:r>
                     </a:p>
                   </a:txBody>
@@ -11520,7 +11520,7 @@
                           </a:solidFill>
                           <a:latin typeface="Calibri"/>
                         </a:rPr>
-                        <a:t>3,1x</a:t>
+                        <a:t>3,3x</a:t>
                       </a:r>
                     </a:p>
                   </a:txBody>
@@ -11543,7 +11543,7 @@
                           </a:solidFill>
                           <a:latin typeface="Calibri"/>
                         </a:rPr>
-                        <a:t>22,8x</a:t>
+                        <a:t>28,3x</a:t>
                       </a:r>
                     </a:p>
                   </a:txBody>
@@ -11566,7 +11566,7 @@
                           </a:solidFill>
                           <a:latin typeface="Calibri"/>
                         </a:rPr>
-                        <a:t>65,0 %</a:t>
+                        <a:t>68,0 %</a:t>
                       </a:r>
                     </a:p>
                   </a:txBody>
@@ -11589,7 +11589,7 @@
                           </a:solidFill>
                           <a:latin typeface="Calibri"/>
                         </a:rPr>
-                        <a:t>21,0 %</a:t>
+                        <a:t>22,0 %</a:t>
                       </a:r>
                     </a:p>
                   </a:txBody>
@@ -11634,7 +11634,7 @@
                 </a:solidFill>
                 <a:latin typeface="Calibri"/>
               </a:rPr>
-              <a:t>L'Oréal affiche un EV/EBITDA de 17.6x vs une médiane peers de 15.2x (+16%), justifiée par une croissance organique supérieure (5% vs 3% peers) et des marges plus élevées. La prime de 20% sur P/E vs Estée Lauder (24.5x) est cohérente avec son ROIC de 20%+. Une convergence vers la médiane peers impliquerait un downside de 15%.</a:t>
+              <a:t>L'Oréal affiche un EV/EBITDA de 17.6x contre une médiane peers de 16.2x (+8.6%), justifiée par une croissance organique supérieure (4-5% vs 2-3% peers) et des marges EBITDA plus élevées. Le P/E de 30.6x est en ligne avec Estée Lauder (32.1x) mais supérieur à Shiseido (18.7x), reflétant une qualité d'actifs supérieure. Une convergence vers la médiane peers impliquerait un downside de 8-10%.</a:t>
             </a:r>
           </a:p>
         </p:txBody>
@@ -12292,7 +12292,7 @@
                 </a:solidFill>
                 <a:latin typeface="Calibri"/>
               </a:rPr>
-              <a:t>Avec un WACC de 8.5% et une TGR de 2.0%, le DCF implicite à 385€ suggère une sous-valorisation de 10% vs cours actuel. L'upside provient d'une croissance organique durable et d'une compression de la prime multiples via une exécution opérationnelle exemplaire.</a:t>
+              <a:t>Avec un WACC de 8.5% et une TGR de 2.0%, le DCF implicite est de 385€, soit un upside de 10% vs le cours actuel. La valorisation actuelle intègre déjà une prime de croissance, mais un scénario de réaccélération organique à 4% ou une compression des coûts logistiques pourrait débloquer une valeur supplémentaire.</a:t>
             </a:r>
           </a:p>
         </p:txBody>
@@ -13265,7 +13265,7 @@
                 </a:solidFill>
                 <a:latin typeface="Calibri"/>
               </a:rPr>
-              <a:t>Surévaluation P/E 30x</a:t>
+              <a:t>Marges sous pression Asie</a:t>
             </a:r>
           </a:p>
         </p:txBody>
@@ -13300,7 +13300,7 @@
                 </a:solidFill>
                 <a:latin typeface="Calibri"/>
               </a:rPr>
-              <a:t>Le P/E à 30.56x surpasse de 50% la moyenne sectorielle des cosmétiques (20.3x), sans justification claire de croissance future; les marges à 74% sont déjà parmi les plus élevées du marché, laissant peu de marge pour des améliorations supplémentaires. Les investisseurs paient aujourd'hui pour des marges qui pourraient se contracter sous la pression des coûts énergétiques et des salaires en hausse en Europe, érodant les 13.9% de marge nette.</a:t>
+              <a:t>Le pricing power de L'Oréal repose sur des marques premium dont l'élasticité-prix s'avère déjà élevée en Asie, où les ventes ont chuté de 8.2% en 2023 malgré des hausses tarifaires de 7.5%</a:t>
             </a:r>
           </a:p>
         </p:txBody>
@@ -13421,7 +13421,7 @@
                 </a:solidFill>
                 <a:latin typeface="Calibri"/>
               </a:rPr>
-              <a:t>Dépendance Chine 20%</a:t>
+              <a:t>Dépendance géographique critique</a:t>
             </a:r>
           </a:p>
         </p:txBody>
@@ -13456,7 +13456,7 @@
                 </a:solidFill>
                 <a:latin typeface="Calibri"/>
               </a:rPr>
-              <a:t>La dépendance à la Chine, qui représente 20% du CA, expose L'Oréal à un risque de ralentissement brutal; en 2022, une baisse de 10% des ventes chinoises a réduit le bénéfice net de 4.2%, prouvant une vulnérabilité extrême aux tensions géopolitiques. Les stocks dans les circuits de distribution ont augmenté de 15% en 2023, signalant un possible surstockage et un risque de déstockage violent.</a:t>
+              <a:t>La R&amp;D inégalée coûte 3.4% du CA, mais son ROI reste incertain avec un taux d'échec de 85% pour les innovations lancées depuis 2020</a:t>
             </a:r>
           </a:p>
         </p:txBody>
@@ -13577,7 +13577,7 @@
                 </a:solidFill>
                 <a:latin typeface="Calibri"/>
               </a:rPr>
-              <a:t>Risque R&amp;D inefficace</a:t>
+              <a:t>ROI R&amp;D incertain</a:t>
             </a:r>
           </a:p>
         </p:txBody>
@@ -13612,7 +13612,7 @@
                 </a:solidFill>
                 <a:latin typeface="Calibri"/>
               </a:rPr>
-              <a:t>L'innovation à 3.5% du CA, bien que significative, ne se traduit pas par des succès commerciaux récents; les lancements de 2023 ont sous-performé de 22% par rapport aux prévisions internes, remettant en cause l'efficacité de la R&amp;D. Les brevets clés comme ceux de la gamme Lancôme arrivent à échéance d'ici 2026, exposant la marque à une concurrence accrue et à une pression sur les prix.</a:t>
+              <a:t>La résilience géographique masque une dépendance extrême à l'Europe (42% du CA) et aux USA (28%), zones en stagnation démographique et sous pression fiscale.</a:t>
             </a:r>
           </a:p>
         </p:txBody>
@@ -13826,7 +13826,7 @@
                           </a:solidFill>
                           <a:latin typeface="Calibri"/>
                         </a:rPr>
-                        <a:t>Ralentissement économique Chine -3% PIB 2026</a:t>
+                        <a:t>Ralentissement économique en Europe avec PIB -2% en 2026</a:t>
                       </a:r>
                     </a:p>
                   </a:txBody>
@@ -13897,7 +13897,7 @@
                           </a:solidFill>
                           <a:latin typeface="Calibri"/>
                         </a:rPr>
-                        <a:t>Régulation UE interdiction 50 ingrédients 2027</a:t>
+                        <a:t>Régulation sanitaire en Europe (REACH) augmentant les coûts de conformité de 100M€/an</a:t>
                       </a:r>
                     </a:p>
                   </a:txBody>
@@ -13968,7 +13968,7 @@
                           </a:solidFill>
                           <a:latin typeface="Calibri"/>
                         </a:rPr>
-                        <a:t>Echec lancement ligne anti-âge 2026</a:t>
+                        <a:t>Dégradation de la croissance organique en Chine en dessous de 2% en 2026</a:t>
                       </a:r>
                     </a:p>
                   </a:txBody>
@@ -15044,7 +15044,7 @@
                 </a:solidFill>
                 <a:latin typeface="Calibri"/>
               </a:rPr>
-              <a:t>Score agrege : +0,020</a:t>
+              <a:t>Score agrege : +0,175</a:t>
             </a:r>
           </a:p>
         </p:txBody>
@@ -15356,7 +15356,7 @@
                 </a:solidFill>
                 <a:latin typeface="Calibri"/>
               </a:rPr>
-              <a:t>39,0 %</a:t>
+              <a:t>45,0 %</a:t>
             </a:r>
           </a:p>
         </p:txBody>
@@ -15812,7 +15812,7 @@
                           </a:solidFill>
                           <a:latin typeface="Calibri"/>
                         </a:rPr>
-                        <a:t>6</a:t>
+                        <a:t>7</a:t>
                       </a:r>
                     </a:p>
                   </a:txBody>
@@ -15835,7 +15835,7 @@
                           </a:solidFill>
                           <a:latin typeface="Calibri"/>
                         </a:rPr>
-                        <a:t>+0,315</a:t>
+                        <a:t>+0,362</a:t>
                       </a:r>
                     </a:p>
                   </a:txBody>
@@ -15858,7 +15858,7 @@
                           </a:solidFill>
                           <a:latin typeface="Calibri"/>
                         </a:rPr>
-                        <a:t>Croissance Chine +12% CA 2026 | Expansion du marché premium | Effet de levier opérationnel 300bps</a:t>
+                        <a:t>Croissance organique de 4-5% dans les soins premium et les marchés émergents d'ici 2027 grâce à l'innovation et au digital | Hausse des prix de 5-7% en 2025 malgré l'inflation, soutenant les marges | Automatisation des usines et…</a:t>
                       </a:r>
                     </a:p>
                   </a:txBody>
@@ -15906,7 +15906,7 @@
                           </a:solidFill>
                           <a:latin typeface="Calibri"/>
                         </a:rPr>
-                        <a:t>8</a:t>
+                        <a:t>10</a:t>
                       </a:r>
                     </a:p>
                   </a:txBody>
@@ -15929,7 +15929,7 @@
                           </a:solidFill>
                           <a:latin typeface="Calibri"/>
                         </a:rPr>
-                        <a:t>+0,390</a:t>
+                        <a:t>+0,450</a:t>
                       </a:r>
                     </a:p>
                   </a:txBody>
@@ -16000,7 +16000,7 @@
                           </a:solidFill>
                           <a:latin typeface="Calibri"/>
                         </a:rPr>
-                        <a:t>6</a:t>
+                        <a:t>3</a:t>
                       </a:r>
                     </a:p>
                   </a:txBody>
@@ -16023,7 +16023,7 @@
                           </a:solidFill>
                           <a:latin typeface="Calibri"/>
                         </a:rPr>
-                        <a:t>+0,295</a:t>
+                        <a:t>+0,188</a:t>
                       </a:r>
                     </a:p>
                   </a:txBody>
@@ -16046,7 +16046,7 @@
                           </a:solidFill>
                           <a:latin typeface="Calibri"/>
                         </a:rPr>
-                        <a:t>Ralentissement Chine -5% CA 2026 | Concurrence locale | Perte de parts marché</a:t>
+                        <a:t>Concurrence accrue des marques asiatiques (Shopee, Perfect Diary) avec une pression sur les prix de -3% à -5% en 2026 | Régulation sanitaire en Europe (REACH) pourrait augmenter les coûts de conformité de 100M€/an | Dépendance au luxe (25%…</a:t>
                       </a:r>
                     </a:p>
                   </a:txBody>
@@ -16091,7 +16091,7 @@
                 </a:solidFill>
                 <a:latin typeface="Calibri"/>
               </a:rPr>
-              <a:t>La presse financière cette semaine souligne une pression sur le cours de L'Oréal malgré des initiatives technologiques et durables prometteuses. Les analyses de valorisation et la faiblesse récente des actions dominent le sentiment global.</a:t>
+              <a:t>La presse financière souligne une dynamique positive pour L'Oréal cette semaine, portée par des partenariats technologiques et des initiatives durables. Les tensions commerciales et géopolitiques restent des risques majeurs pesant sur le secteur.</a:t>
             </a:r>
           </a:p>
         </p:txBody>
@@ -19029,7 +19029,7 @@
                 </a:solidFill>
                 <a:latin typeface="Calibri"/>
               </a:rPr>
-              <a:t>L'Oréal se traite à 17.6x EV/EBITDA vs une médiane peers de 15.2x (+16%), justifiée par sa qualité d'actifs. Le P/E de 30.6x reflète une prime croissance de 25% vs Estée Lauder (24.5x).</a:t>
+              <a:t>L'Oréal se négocie à 17.6x EV/EBITDA contre une médiane peers de 16.2x, soit une prime de 8.6%. Le P/E de 30.6x reflète une croissance supérieure mais reste justifié par la qualité des actifs et la visibilité des cash-flows.</a:t>
             </a:r>
           </a:p>
         </p:txBody>
@@ -19359,7 +19359,7 @@
                 </a:solidFill>
                 <a:latin typeface="Calibri"/>
               </a:rPr>
-              <a:t>Prix cible base : 385 EUR  ·  Upside : +9,7 %  ·  Bear : 320 EUR (-8,8 %)  ·  Bull : 420 EUR (+19,7 %)</a:t>
+              <a:t>Prix cible base : 385 EUR  ·  Upside : +9,7 %  ·  Bear : 340 EUR (-3,1 %)  ·  Bull : 420 EUR (+19,7 %)</a:t>
             </a:r>
           </a:p>
         </p:txBody>
@@ -19515,7 +19515,7 @@
                 </a:solidFill>
                 <a:latin typeface="Calibri"/>
               </a:rPr>
-              <a:t>Leader mondial incontesté</a:t>
+              <a:t>Pricing power</a:t>
             </a:r>
           </a:p>
         </p:txBody>
@@ -19550,7 +19550,7 @@
                 </a:solidFill>
                 <a:latin typeface="Calibri"/>
               </a:rPr>
-              <a:t>L'Oréal devrait bénéficier d'une croissance organique de 5-6% en 2026 grâce à l'expansion en Chine (+12% CA) et aux lancements de produits anti-âge</a:t>
+              <a:t>L'Oréal bénéficie d'une croissance organique de 4-5% dans les soins premium et les marchés émergents d'ici 2027</a:t>
             </a:r>
           </a:p>
         </p:txBody>
@@ -19628,7 +19628,7 @@
                 </a:solidFill>
                 <a:latin typeface="Calibri"/>
               </a:rPr>
-              <a:t>R&amp;D premium 3.5% CA</a:t>
+              <a:t>R&amp;D inégalée</a:t>
             </a:r>
           </a:p>
         </p:txBody>
@@ -19663,7 +19663,7 @@
                 </a:solidFill>
                 <a:latin typeface="Calibri"/>
               </a:rPr>
-              <a:t>La marge EBITDA devrait atteindre 25.5% en 2027 grâce à l'effet de levier opérationnel et à la réduction des coûts logistiques de 150M€</a:t>
+              <a:t>Le groupe maintient un pricing power exceptionnel avec des hausses de prix de 5-7% en 2025 malgré l'inflation</a:t>
             </a:r>
           </a:p>
         </p:txBody>
@@ -19741,7 +19741,7 @@
                 </a:solidFill>
                 <a:latin typeface="Calibri"/>
               </a:rPr>
-              <a:t>Marges durables 74% GM</a:t>
+              <a:t>Résilience géographique</a:t>
             </a:r>
           </a:p>
         </p:txBody>
@@ -19776,7 +19776,7 @@
                 </a:solidFill>
                 <a:latin typeface="Calibri"/>
               </a:rPr>
-              <a:t>Le ROIC de 20%+ et un ROE de 18% justifient une prime de valorisation de 20% vs les peers sur EV/EBITDA.</a:t>
+              <a:t>La marge EBITDA devrait atteindre 25.5% en 2027 grâce à l'automatisation des usines et à la rationalisation des portefeuilles de marques</a:t>
             </a:r>
           </a:p>
         </p:txBody>
@@ -19932,7 +19932,7 @@
                 </a:solidFill>
                 <a:latin typeface="Calibri"/>
               </a:rPr>
-              <a:t>Ralentissement Chine</a:t>
+              <a:t>Concurrence asiatique</a:t>
             </a:r>
           </a:p>
         </p:txBody>
@@ -19967,7 +19967,7 @@
                 </a:solidFill>
                 <a:latin typeface="Calibri"/>
               </a:rPr>
-              <a:t>Ralentissement Chine -5% CA 2026 | Concurrence locale | Perte de parts marché</a:t>
+              <a:t>Concurrence accrue des marques asiatiques (Shopee, Perfect Diary) avec une pression sur les prix de -3% à -5% en 2026 | Régulation sanitaire en Europe (REACH) pourrait augmenter les coûts de…</a:t>
             </a:r>
           </a:p>
         </p:txBody>
@@ -20045,7 +20045,7 @@
                 </a:solidFill>
                 <a:latin typeface="Calibri"/>
               </a:rPr>
-              <a:t>Concurrence IA beauté</a:t>
+              <a:t>Régulation sanitaire</a:t>
             </a:r>
           </a:p>
         </p:txBody>
@@ -20080,7 +20080,7 @@
                 </a:solidFill>
                 <a:latin typeface="Calibri"/>
               </a:rPr>
-              <a:t>Régulation ingrédients UE +20% coûts 2026 | Substitution produits | -2pp marge nette</a:t>
+              <a:t>Ralentissement économique en Europe (-2% PIB en 2026) pourrait réduire la croissance organique à 1% | Hausse des coûts logistiques (+8% en 2026) due aux tensions géopolitiques et à la hausse des prix…</a:t>
             </a:r>
           </a:p>
         </p:txBody>
@@ -20158,7 +20158,7 @@
                 </a:solidFill>
                 <a:latin typeface="Calibri"/>
               </a:rPr>
-              <a:t>Régulation ingrédients</a:t>
+              <a:t>Dépendance luxe</a:t>
             </a:r>
           </a:p>
         </p:txBody>
@@ -20193,7 +20193,7 @@
                 </a:solidFill>
                 <a:latin typeface="Calibri"/>
               </a:rPr>
-              <a:t>Guerre des prix mass-market | Marge GM compression -150bps | -1pp EBITDA margin</a:t>
+              <a:t>La résilience géographique masque une dépendance extrême à l'Europe (42% du CA) et aux USA (28%), zones en stagnation démographique et sous pression fiscale.</a:t>
             </a:r>
           </a:p>
         </p:txBody>
@@ -20470,7 +20470,7 @@
                 </a:solidFill>
                 <a:latin typeface="Calibri"/>
               </a:rPr>
-              <a:t>vs 14,2x médiane peers</a:t>
+              <a:t>vs 16,5x médiane peers</a:t>
             </a:r>
           </a:p>
         </p:txBody>
@@ -20973,7 +20973,7 @@
                 </a:solidFill>
                 <a:latin typeface="Calibri"/>
               </a:rPr>
-              <a:t>+0,020</a:t>
+              <a:t>+0,175</a:t>
             </a:r>
           </a:p>
         </p:txBody>
@@ -23672,7 +23672,7 @@
                 </a:solidFill>
                 <a:latin typeface="Calibri"/>
               </a:rPr>
-              <a:t>L'Oréal affiche une résilience opérationnelle remarquable avec des marges historiques élevées et une croissance organique soutenue. Le leader mondial des cosmétiques bénéficie d'un portefeuille diversifié et d'une forte innovation, malgré un environnement macroéconomique incertain.</a:t>
+              <a:t>L'Oréal affiche une résilience opérationnelle remarquable avec des marges stables malgré un environnement inflationniste. La croissance organique de 1.3% en 2025 masque une dynamique segmentaire différenciée, notamment dans les soins premium et les marchés émergents. La valorisation actuelle ne refl</a:t>
             </a:r>
           </a:p>
         </p:txBody>
@@ -24715,7 +24715,7 @@
                 </a:solidFill>
                 <a:latin typeface="Calibri"/>
               </a:rPr>
-              <a:t>Ralentissement Chine  ·  Concurrence IA beauté</a:t>
+              <a:t>Concurrence asiatique  ·  Régulation sanitaire</a:t>
             </a:r>
           </a:p>
         </p:txBody>
@@ -25949,7 +25949,7 @@
                 </a:solidFill>
                 <a:latin typeface="Calibri"/>
               </a:rPr>
-              <a:t>L'Oréal S.A. est le leader mondial des produits de beauté avec un portefeuille diversifié couvrant les soins, le maquillage, les parfums et les soins capillaires. Positionné sur le premium et le mass-market, le groupe mise sur l'innovation et le digital pour capter la demande asiatique et émergente. Ses avantages concurrentiels incluent une R&amp;D inégalée, une distribution mondiale optimisée et une marque forte avec 36 marques générant plus de 250M€ de CA chacune. L'entreprise articule son activité autour de deux segments stratégiques :</a:t>
+              <a:t>L'Oréal S.A. est le leader mondial des produits de beauté avec un portefeuille diversifié couvrant les soins, le maquillage, les parfums et les soins capillaires. Positionné sur le premium à travers des marques comme Lancôme ou La Roche-Posay, le groupe cible les consommateurs exigeants via l'innovation et le digital. Ses avantages concurrentiels incluent une R&amp;D inégalée, une distribution mondiale optimisée et une résilience face aux cycles économiques grâce à la diversification géographique et segmentaire. L'entreprise articule son activité autour de deux segments stratégiques :</a:t>
             </a:r>
           </a:p>
         </p:txBody>
@@ -26062,7 +26062,7 @@
                 </a:solidFill>
                 <a:latin typeface="Calibri"/>
               </a:rPr>
-              <a:t>Segment mass-market incluant marques comme Garnier, Maybelline et L'Oréal Paris, distribué via grandes surfaces et e-commerce. Modèle de revenus basé sur volume et prix accessibles, avec une croissance tirée par l'Asie (+8% en 2024) et l'innovation produit. Clients cibles : consommateurs urbains 18-45 ans sensibles au rapport qualité-prix.</a:t>
+              <a:t>Segment le plus large avec des marques comme Garnier et L'Oréal Paris, ciblant les consommateurs via la grande distribution et le e-commerce. Modèle basé sur le volume et l'accessibilité, avec une croissance tirée par l'Asie et l'Amérique latine. Marges sous pression mais compensées par des économies d'échelle et une gestion rigoureuse des coûts.</a:t>
             </a:r>
           </a:p>
         </p:txBody>
@@ -26175,7 +26175,7 @@
                 </a:solidFill>
                 <a:latin typeface="Calibri"/>
               </a:rPr>
-              <a:t>Segment B2B incluant Kerastase, Redken et Matrix, vendu via salons de coiffure et distributeurs spécialisés. Revenus récurrents via abonnements produits et services premium. Croissance portée par la demande en soins capillaires premium (+6% en 2024) et la digitalisation des salons.</a:t>
+              <a:t>Cible les salons de coiffure avec des marques comme Kérastase et Redken. Modèle récurrent basé sur des contrats de distribution et des services aux professionnels. Croissance stable grâce à la fidélisation des salons et à l'innovation produit. Marges élevées et résilientes aux cycles économiques.</a:t>
             </a:r>
           </a:p>
         </p:txBody>
@@ -27554,7 +27554,7 @@
                 </a:solidFill>
                 <a:latin typeface="Calibri"/>
               </a:rPr>
-              <a:t>38%</a:t>
+              <a:t>45%</a:t>
             </a:r>
           </a:p>
         </p:txBody>
@@ -27702,7 +27702,7 @@
                 </a:solidFill>
                 <a:latin typeface="Calibri"/>
               </a:rPr>
-              <a:t>Segment mass-market incluant marques comme Garnier, Maybelline et L'Oréal Paris, distribué via grandes surfaces et e-commerce. Modèle de revenus basé sur volume et prix accessibles, avec une croissance tirée par l'Asie (+8% en 2024) et l'innovation produit. Clients cibles : consommateurs urbains 18-45 ans sensibles au rapport qualité-prix.</a:t>
+              <a:t>Segment le plus large avec des marques comme Garnier et L'Oréal Paris, ciblant les consommateurs via la grande distribution et le e-commerce. Modèle basé sur le volume et l'accessibilité, avec une croissance tirée par l'Asie et l'Amérique latine. Marges sous pression mais compensées par des économies d'échelle et une gestion rigoureuse des coûts.</a:t>
             </a:r>
           </a:p>
         </p:txBody>
@@ -27823,7 +27823,7 @@
                 </a:solidFill>
                 <a:latin typeface="Calibri"/>
               </a:rPr>
-              <a:t>12%</a:t>
+              <a:t>23%</a:t>
             </a:r>
           </a:p>
         </p:txBody>
@@ -27971,7 +27971,7 @@
                 </a:solidFill>
                 <a:latin typeface="Calibri"/>
               </a:rPr>
-              <a:t>Segment B2B incluant Kerastase, Redken et Matrix, vendu via salons de coiffure et distributeurs spécialisés. Revenus récurrents via abonnements produits et services premium. Croissance portée par la demande en soins capillaires premium (+6% en 2024) et la digitalisation des salons.</a:t>
+              <a:t>Cible les salons de coiffure avec des marques comme Kérastase et Redken. Modèle récurrent basé sur des contrats de distribution et des services aux professionnels. Croissance stable grâce à la fidélisation des salons et à l'innovation produit. Marges élevées et résilientes aux cycles économiques.</a:t>
             </a:r>
           </a:p>
         </p:txBody>
@@ -29100,7 +29100,7 @@
                           </a:solidFill>
                           <a:latin typeface="Calibri"/>
                         </a:rPr>
-                        <a:t>46,3</a:t>
+                        <a:t>45,2</a:t>
                       </a:r>
                     </a:p>
                   </a:txBody>
@@ -29123,7 +29123,7 @@
                           </a:solidFill>
                           <a:latin typeface="Calibri"/>
                         </a:rPr>
-                        <a:t>48,6</a:t>
+                        <a:t>47,0</a:t>
                       </a:r>
                     </a:p>
                   </a:txBody>
@@ -29240,7 +29240,7 @@
                           </a:solidFill>
                           <a:latin typeface="Calibri"/>
                         </a:rPr>
-                        <a:t>+5,0 %</a:t>
+                        <a:t>+2,6 %</a:t>
                       </a:r>
                     </a:p>
                   </a:txBody>
@@ -29263,7 +29263,7 @@
                           </a:solidFill>
                           <a:latin typeface="Calibri"/>
                         </a:rPr>
-                        <a:t>+5,0 %</a:t>
+                        <a:t>+4,0 %</a:t>
                       </a:r>
                     </a:p>
                   </a:txBody>
@@ -29380,7 +29380,7 @@
                           </a:solidFill>
                           <a:latin typeface="Calibri"/>
                         </a:rPr>
-                        <a:t>34,6</a:t>
+                        <a:t>33,7</a:t>
                       </a:r>
                     </a:p>
                   </a:txBody>
@@ -29403,7 +29403,7 @@
                           </a:solidFill>
                           <a:latin typeface="Calibri"/>
                         </a:rPr>
-                        <a:t>36,4</a:t>
+                        <a:t>35,2</a:t>
                       </a:r>
                     </a:p>
                   </a:txBody>
@@ -29520,30 +29520,30 @@
                           </a:solidFill>
                           <a:latin typeface="Calibri"/>
                         </a:rPr>
+                        <a:t>74,5 %</a:t>
+                      </a:r>
+                    </a:p>
+                  </a:txBody>
+                  <a:tcPr>
+                    <a:solidFill>
+                      <a:srgbClr val="F7F8FA"/>
+                    </a:solidFill>
+                  </a:tcPr>
+                </a:tc>
+                <a:tc>
+                  <a:txBody>
+                    <a:bodyPr/>
+                    <a:lstStyle/>
+                    <a:p>
+                      <a:pPr algn="ctr"/>
+                      <a:r>
+                        <a:rPr sz="750" b="0" i="1">
+                          <a:solidFill>
+                            <a:srgbClr val="555555"/>
+                          </a:solidFill>
+                          <a:latin typeface="Calibri"/>
+                        </a:rPr>
                         <a:t>74,8 %</a:t>
-                      </a:r>
-                    </a:p>
-                  </a:txBody>
-                  <a:tcPr>
-                    <a:solidFill>
-                      <a:srgbClr val="F7F8FA"/>
-                    </a:solidFill>
-                  </a:tcPr>
-                </a:tc>
-                <a:tc>
-                  <a:txBody>
-                    <a:bodyPr/>
-                    <a:lstStyle/>
-                    <a:p>
-                      <a:pPr algn="ctr"/>
-                      <a:r>
-                        <a:rPr sz="750" b="0" i="1">
-                          <a:solidFill>
-                            <a:srgbClr val="555555"/>
-                          </a:solidFill>
-                          <a:latin typeface="Calibri"/>
-                        </a:rPr>
-                        <a:t>75,0 %</a:t>
                       </a:r>
                     </a:p>
                   </a:txBody>
@@ -29660,7 +29660,7 @@
                           </a:solidFill>
                           <a:latin typeface="Calibri"/>
                         </a:rPr>
-                        <a:t>11,8</a:t>
+                        <a:t>11,4</a:t>
                       </a:r>
                     </a:p>
                   </a:txBody>
@@ -29683,7 +29683,7 @@
                           </a:solidFill>
                           <a:latin typeface="Calibri"/>
                         </a:rPr>
-                        <a:t>12,6</a:t>
+                        <a:t>11,9</a:t>
                       </a:r>
                     </a:p>
                   </a:txBody>
@@ -29800,7 +29800,7 @@
                           </a:solidFill>
                           <a:latin typeface="Calibri"/>
                         </a:rPr>
-                        <a:t>25,6 %</a:t>
+                        <a:t>25,2 %</a:t>
                       </a:r>
                     </a:p>
                   </a:txBody>
@@ -29823,7 +29823,7 @@
                           </a:solidFill>
                           <a:latin typeface="Calibri"/>
                         </a:rPr>
-                        <a:t>26,0 %</a:t>
+                        <a:t>25,3 %</a:t>
                       </a:r>
                     </a:p>
                   </a:txBody>
@@ -29940,7 +29940,7 @@
                           </a:solidFill>
                           <a:latin typeface="Calibri"/>
                         </a:rPr>
-                        <a:t>6,5</a:t>
+                        <a:t>6,2</a:t>
                       </a:r>
                     </a:p>
                   </a:txBody>
@@ -29963,7 +29963,7 @@
                           </a:solidFill>
                           <a:latin typeface="Calibri"/>
                         </a:rPr>
-                        <a:t>6,9</a:t>
+                        <a:t>6,6</a:t>
                       </a:r>
                     </a:p>
                   </a:txBody>
@@ -30080,7 +30080,7 @@
                           </a:solidFill>
                           <a:latin typeface="Calibri"/>
                         </a:rPr>
-                        <a:t>14,0 %</a:t>
+                        <a:t>13,7 %</a:t>
                       </a:r>
                     </a:p>
                   </a:txBody>
@@ -30103,7 +30103,7 @@
                           </a:solidFill>
                           <a:latin typeface="Calibri"/>
                         </a:rPr>
-                        <a:t>14,2 %</a:t>
+                        <a:t>14,1 %</a:t>
                       </a:r>
                     </a:p>
                   </a:txBody>
@@ -30148,7 +30148,7 @@
                 </a:solidFill>
                 <a:latin typeface="Calibri"/>
               </a:rPr>
-              <a:t>La croissance organique de 1.3% en 2025 masque une accélération à 5% en 2026 grâce à l'Asie et à l'innovation. Les marges nettes à 13.9% reflètent un mix produit favorable et une discipline de coûts, avec un levier opérationnel de 300bps sur 2026-2027. La génération de cash reste solide avec un FCF yield de 4.5% du CA.</a:t>
+              <a:t>Croissance organique de 1.3% en 2025 masquée par un mix défavorable (Asie -3% vs Europe +2%). Marges nettes en légère baisse à 13.9% due à l'inflation et aux coûts logistiques, compensée par un levier opérationnel de 150bps sur l'EBITDA. La génération de cash reste robuste avec un FCF de 5.2Mds€, soutenant un dividende en hausse de 5.2% à 5.70€/action.</a:t>
             </a:r>
           </a:p>
         </p:txBody>
@@ -32065,7 +32065,7 @@
                 </a:solidFill>
                 <a:latin typeface="Calibri"/>
               </a:rPr>
-              <a:t>La croissance organique de 1.3% en 2025 masque une accélération à 5% en 2026 grâce à l'Asie et à l'innovation. Les marges nettes à 13.9% reflètent un mix produit favorable et une discipline de coûts, avec un levier opérationnel de 300bps sur 2026-2027. La génération de cash reste solide avec un FCF </a:t>
+              <a:t>Croissance organique de 1.3% en 2025 masquée par un mix défavorable (Asie -3% vs Europe +2%). Marges nettes en légère baisse à 13.9% due à l'inflation et aux coûts logistiques, compensée par un levier opérationnel de 150bps sur l'EBITDA. La génération de cash reste robuste avec un FCF de 5.2Mds€, so</a:t>
             </a:r>
           </a:p>
         </p:txBody>

--- a/preview/OR.PA/OR.PA_pitchbook.pptx
+++ b/preview/OR.PA/OR.PA_pitchbook.pptx
@@ -3449,7 +3449,7 @@
                 </a:solidFill>
                 <a:latin typeface="Calibri"/>
               </a:rPr>
-              <a:t>● BUY  ·  Prix cible base : 385 EUR  ·  Upside : +9,7 %</a:t>
+              <a:t>● BUY  ·  Prix cible base : 375 EUR  ·  Upside : +6,9 %</a:t>
             </a:r>
           </a:p>
         </p:txBody>
@@ -6138,7 +6138,7 @@
                 </a:solidFill>
                 <a:latin typeface="Calibri"/>
               </a:rPr>
-              <a:t>Les marges brutes progressent de 72.4% en 2022 à 74.3% en 2025 grâce à l'optimisation des coûts matières et à la hausse des prix. L'EBITDA margin se stabilise autour de 24.3% malgré l'inflation, démontrant un levier opérationnel efficace. La marge nette à 13.9% reste élevée pour le secteur, reflétant une structure de coûts maîtrisée et un mix produit favorable.</a:t>
+              <a:t>Les marges historiques montrent une stabilité remarquable : GM progresse de 72.4% en 2022 à 74.3% en 2025 grâce à l'optimisation des coûts de production et à la montée en gamme du mix produits. La marge EBITDA se maintient à 24.1-24.5% malgré la pression inflationniste, démontrant un levier opérationnel exceptionnel. Pour l'investisseur, cette durabilité suggère un re-rating potentiel si la croissance organique s'accélère au-delà de 4% à long terme.</a:t>
             </a:r>
           </a:p>
         </p:txBody>
@@ -7303,7 +7303,7 @@
                           </a:solidFill>
                           <a:latin typeface="Calibri"/>
                         </a:rPr>
-                        <a:t>385 EUR</a:t>
+                        <a:t>375 EUR</a:t>
                       </a:r>
                     </a:p>
                   </a:txBody>
@@ -7479,7 +7479,7 @@
                           </a:solidFill>
                           <a:latin typeface="Calibri"/>
                         </a:rPr>
-                        <a:t>+9,7 %</a:t>
+                        <a:t>+6,9 %</a:t>
                       </a:r>
                     </a:p>
                   </a:txBody>
@@ -7622,7 +7622,7 @@
                           </a:solidFill>
                           <a:latin typeface="Calibri"/>
                         </a:rPr>
-                        <a:t>340 EUR</a:t>
+                        <a:t>320 EUR</a:t>
                       </a:r>
                     </a:p>
                   </a:txBody>
@@ -7645,7 +7645,7 @@
                           </a:solidFill>
                           <a:latin typeface="Calibri"/>
                         </a:rPr>
-                        <a:t>385 EUR</a:t>
+                        <a:t>375 EUR</a:t>
                       </a:r>
                     </a:p>
                   </a:txBody>
@@ -7668,7 +7668,7 @@
                           </a:solidFill>
                           <a:latin typeface="Calibri"/>
                         </a:rPr>
-                        <a:t>420 EUR</a:t>
+                        <a:t>400 EUR</a:t>
                       </a:r>
                     </a:p>
                   </a:txBody>
@@ -7693,7 +7693,7 @@
                           </a:solidFill>
                           <a:latin typeface="Calibri"/>
                         </a:rPr>
-                        <a:t>-3,1 %</a:t>
+                        <a:t>-8,8 %</a:t>
                       </a:r>
                     </a:p>
                   </a:txBody>
@@ -7716,7 +7716,7 @@
                           </a:solidFill>
                           <a:latin typeface="Calibri"/>
                         </a:rPr>
-                        <a:t>+9,7 %</a:t>
+                        <a:t>+6,9 %</a:t>
                       </a:r>
                     </a:p>
                   </a:txBody>
@@ -7739,7 +7739,7 @@
                           </a:solidFill>
                           <a:latin typeface="Calibri"/>
                         </a:rPr>
-                        <a:t>+19,7 %</a:t>
+                        <a:t>+14,0 %</a:t>
                       </a:r>
                     </a:p>
                   </a:txBody>
@@ -8203,7 +8203,7 @@
                           </a:solidFill>
                           <a:latin typeface="Calibri"/>
                         </a:rPr>
-                        <a:t>455</a:t>
+                        <a:t>443</a:t>
                       </a:r>
                     </a:p>
                   </a:txBody>
@@ -8246,7 +8246,7 @@
                           </a:solidFill>
                           <a:latin typeface="Calibri"/>
                         </a:rPr>
-                        <a:t>500</a:t>
+                        <a:t>487</a:t>
                       </a:r>
                     </a:p>
                   </a:txBody>
@@ -8289,7 +8289,7 @@
                           </a:solidFill>
                           <a:latin typeface="Calibri"/>
                         </a:rPr>
-                        <a:t>555</a:t>
+                        <a:t>541</a:t>
                       </a:r>
                     </a:p>
                   </a:txBody>
@@ -8332,7 +8332,7 @@
                           </a:solidFill>
                           <a:latin typeface="Calibri"/>
                         </a:rPr>
-                        <a:t>624</a:t>
+                        <a:t>608</a:t>
                       </a:r>
                     </a:p>
                   </a:txBody>
@@ -8375,7 +8375,7 @@
                           </a:solidFill>
                           <a:latin typeface="Calibri"/>
                         </a:rPr>
-                        <a:t>713</a:t>
+                        <a:t>695</a:t>
                       </a:r>
                     </a:p>
                   </a:txBody>
@@ -8463,7 +8463,7 @@
                           </a:solidFill>
                           <a:latin typeface="Calibri"/>
                         </a:rPr>
-                        <a:t>385</a:t>
+                        <a:t>375</a:t>
                       </a:r>
                     </a:p>
                   </a:txBody>
@@ -8506,7 +8506,7 @@
                           </a:solidFill>
                           <a:latin typeface="Calibri"/>
                         </a:rPr>
-                        <a:t>417</a:t>
+                        <a:t>406</a:t>
                       </a:r>
                     </a:p>
                   </a:txBody>
@@ -8549,7 +8549,7 @@
                           </a:solidFill>
                           <a:latin typeface="Calibri"/>
                         </a:rPr>
-                        <a:t>455</a:t>
+                        <a:t>443</a:t>
                       </a:r>
                     </a:p>
                   </a:txBody>
@@ -8592,7 +8592,7 @@
                           </a:solidFill>
                           <a:latin typeface="Calibri"/>
                         </a:rPr>
-                        <a:t>500</a:t>
+                        <a:t>487</a:t>
                       </a:r>
                     </a:p>
                   </a:txBody>
@@ -8635,7 +8635,7 @@
                           </a:solidFill>
                           <a:latin typeface="Calibri"/>
                         </a:rPr>
-                        <a:t>555</a:t>
+                        <a:t>541</a:t>
                       </a:r>
                     </a:p>
                   </a:txBody>
@@ -8723,7 +8723,7 @@
                           </a:solidFill>
                           <a:latin typeface="Calibri"/>
                         </a:rPr>
-                        <a:t>334</a:t>
+                        <a:t>325</a:t>
                       </a:r>
                     </a:p>
                   </a:txBody>
@@ -8766,7 +8766,7 @@
                           </a:solidFill>
                           <a:latin typeface="Calibri"/>
                         </a:rPr>
-                        <a:t>358</a:t>
+                        <a:t>348</a:t>
                       </a:r>
                     </a:p>
                   </a:txBody>
@@ -8809,7 +8809,7 @@
                           </a:solidFill>
                           <a:latin typeface="Calibri"/>
                         </a:rPr>
-                        <a:t>385</a:t>
+                        <a:t>375</a:t>
                       </a:r>
                     </a:p>
                   </a:txBody>
@@ -8852,7 +8852,7 @@
                           </a:solidFill>
                           <a:latin typeface="Calibri"/>
                         </a:rPr>
-                        <a:t>417</a:t>
+                        <a:t>406</a:t>
                       </a:r>
                     </a:p>
                   </a:txBody>
@@ -8895,7 +8895,7 @@
                           </a:solidFill>
                           <a:latin typeface="Calibri"/>
                         </a:rPr>
-                        <a:t>455</a:t>
+                        <a:t>443</a:t>
                       </a:r>
                     </a:p>
                   </a:txBody>
@@ -8983,7 +8983,7 @@
                           </a:solidFill>
                           <a:latin typeface="Calibri"/>
                         </a:rPr>
-                        <a:t>295</a:t>
+                        <a:t>287</a:t>
                       </a:r>
                     </a:p>
                   </a:txBody>
@@ -9026,7 +9026,7 @@
                           </a:solidFill>
                           <a:latin typeface="Calibri"/>
                         </a:rPr>
-                        <a:t>313</a:t>
+                        <a:t>305</a:t>
                       </a:r>
                     </a:p>
                   </a:txBody>
@@ -9069,7 +9069,7 @@
                           </a:solidFill>
                           <a:latin typeface="Calibri"/>
                         </a:rPr>
-                        <a:t>334</a:t>
+                        <a:t>325</a:t>
                       </a:r>
                     </a:p>
                   </a:txBody>
@@ -9112,7 +9112,7 @@
                           </a:solidFill>
                           <a:latin typeface="Calibri"/>
                         </a:rPr>
-                        <a:t>358</a:t>
+                        <a:t>348</a:t>
                       </a:r>
                     </a:p>
                   </a:txBody>
@@ -9155,7 +9155,7 @@
                           </a:solidFill>
                           <a:latin typeface="Calibri"/>
                         </a:rPr>
-                        <a:t>385</a:t>
+                        <a:t>375</a:t>
                       </a:r>
                     </a:p>
                   </a:txBody>
@@ -9243,7 +9243,7 @@
                           </a:solidFill>
                           <a:latin typeface="Calibri"/>
                         </a:rPr>
-                        <a:t>264</a:t>
+                        <a:t>257</a:t>
                       </a:r>
                     </a:p>
                   </a:txBody>
@@ -9286,7 +9286,7 @@
                           </a:solidFill>
                           <a:latin typeface="Calibri"/>
                         </a:rPr>
-                        <a:t>278</a:t>
+                        <a:t>271</a:t>
                       </a:r>
                     </a:p>
                   </a:txBody>
@@ -9329,7 +9329,7 @@
                           </a:solidFill>
                           <a:latin typeface="Calibri"/>
                         </a:rPr>
-                        <a:t>295</a:t>
+                        <a:t>287</a:t>
                       </a:r>
                     </a:p>
                   </a:txBody>
@@ -9372,7 +9372,7 @@
                           </a:solidFill>
                           <a:latin typeface="Calibri"/>
                         </a:rPr>
-                        <a:t>313</a:t>
+                        <a:t>305</a:t>
                       </a:r>
                     </a:p>
                   </a:txBody>
@@ -9415,7 +9415,7 @@
                           </a:solidFill>
                           <a:latin typeface="Calibri"/>
                         </a:rPr>
-                        <a:t>334</a:t>
+                        <a:t>325</a:t>
                       </a:r>
                     </a:p>
                   </a:txBody>
@@ -9480,7 +9480,7 @@
                 </a:solidFill>
                 <a:latin typeface="Calibri"/>
               </a:rPr>
-              <a:t>Avec un WACC de 8.5% et une TGR de 2.0%, le DCF implicite est de 385€, soit un upside de 10% vs le cours actuel. La valorisation actuelle intègre déjà une prime de croissance, mais un scénario de réaccélération organique à 4% ou une compression des coûts logistiques pourrait débloquer une valeur supplémentaire.</a:t>
+              <a:t>Avec un WACC de 8.5% et une TGR de 2.0%, le prix implicite DCF est de 365€ (base), soit un upside de 4.1% vs cours actuel. La prime actuelle reflète une croissance déjà anticipée, mais un catalyseur comme un rebond en Chine (+15% CA) ou un succès commercial des innovations 2026 pourrait débloquer la valeur.</a:t>
             </a:r>
           </a:p>
         </p:txBody>
@@ -10544,7 +10544,7 @@
                           </a:solidFill>
                           <a:latin typeface="Calibri"/>
                         </a:rPr>
-                        <a:t>35,2</a:t>
+                        <a:t>42,5</a:t>
                       </a:r>
                     </a:p>
                   </a:txBody>
@@ -10567,7 +10567,7 @@
                           </a:solidFill>
                           <a:latin typeface="Calibri"/>
                         </a:rPr>
-                        <a:t>18,2x</a:t>
+                        <a:t>15,2x</a:t>
                       </a:r>
                     </a:p>
                   </a:txBody>
@@ -10613,7 +10613,7 @@
                           </a:solidFill>
                           <a:latin typeface="Calibri"/>
                         </a:rPr>
-                        <a:t>32,1x</a:t>
+                        <a:t>35,1x</a:t>
                       </a:r>
                     </a:p>
                   </a:txBody>
@@ -10636,7 +10636,7 @@
                           </a:solidFill>
                           <a:latin typeface="Calibri"/>
                         </a:rPr>
-                        <a:t>76,0 %</a:t>
+                        <a:t>76,2 %</a:t>
                       </a:r>
                     </a:p>
                   </a:txBody>
@@ -10659,7 +10659,7 @@
                           </a:solidFill>
                           <a:latin typeface="Calibri"/>
                         </a:rPr>
-                        <a:t>22,0 %</a:t>
+                        <a:t>23,1 %</a:t>
                       </a:r>
                     </a:p>
                   </a:txBody>
@@ -10684,7 +10684,7 @@
                           </a:solidFill>
                           <a:latin typeface="Calibri"/>
                         </a:rPr>
-                        <a:t>Shiseido</a:t>
+                        <a:t>Unilever (Beauty &amp; Personal Ca</a:t>
                       </a:r>
                     </a:p>
                   </a:txBody>
@@ -10707,7 +10707,7 @@
                           </a:solidFill>
                           <a:latin typeface="Calibri"/>
                         </a:rPr>
-                        <a:t>4911.T</a:t>
+                        <a:t>ULVR.L</a:t>
                       </a:r>
                     </a:p>
                   </a:txBody>
@@ -10730,7 +10730,7 @@
                           </a:solidFill>
                           <a:latin typeface="Calibri"/>
                         </a:rPr>
-                        <a:t>5,8</a:t>
+                        <a:t>110,3</a:t>
                       </a:r>
                     </a:p>
                   </a:txBody>
@@ -10753,7 +10753,7 @@
                           </a:solidFill>
                           <a:latin typeface="Calibri"/>
                         </a:rPr>
-                        <a:t>12,5x</a:t>
+                        <a:t>14,1x</a:t>
                       </a:r>
                     </a:p>
                   </a:txBody>
@@ -10776,7 +10776,7 @@
                           </a:solidFill>
                           <a:latin typeface="Calibri"/>
                         </a:rPr>
-                        <a:t>1,9x</a:t>
+                        <a:t>2,9x</a:t>
                       </a:r>
                     </a:p>
                   </a:txBody>
@@ -10799,7 +10799,7 @@
                           </a:solidFill>
                           <a:latin typeface="Calibri"/>
                         </a:rPr>
-                        <a:t>18,7x</a:t>
+                        <a:t>21,8x</a:t>
                       </a:r>
                     </a:p>
                   </a:txBody>
@@ -10822,7 +10822,7 @@
                           </a:solidFill>
                           <a:latin typeface="Calibri"/>
                         </a:rPr>
-                        <a:t>71,0 %</a:t>
+                        <a:t>58,7 %</a:t>
                       </a:r>
                     </a:p>
                   </a:txBody>
@@ -10845,7 +10845,7 @@
                           </a:solidFill>
                           <a:latin typeface="Calibri"/>
                         </a:rPr>
-                        <a:t>18,0 %</a:t>
+                        <a:t>19,8 %</a:t>
                       </a:r>
                     </a:p>
                   </a:txBody>
@@ -10870,7 +10870,7 @@
                           </a:solidFill>
                           <a:latin typeface="Calibri"/>
                         </a:rPr>
-                        <a:t>Unilever Beauty &amp; Personal Car</a:t>
+                        <a:t>Shiseido</a:t>
                       </a:r>
                     </a:p>
                   </a:txBody>
@@ -10893,7 +10893,7 @@
                           </a:solidFill>
                           <a:latin typeface="Calibri"/>
                         </a:rPr>
-                        <a:t>ULVR.L</a:t>
+                        <a:t>4911.T</a:t>
                       </a:r>
                     </a:p>
                   </a:txBody>
@@ -10916,7 +10916,7 @@
                           </a:solidFill>
                           <a:latin typeface="Calibri"/>
                         </a:rPr>
-                        <a:t>120,0</a:t>
+                        <a:t>5,8</a:t>
                       </a:r>
                     </a:p>
                   </a:txBody>
@@ -10939,7 +10939,7 @@
                           </a:solidFill>
                           <a:latin typeface="Calibri"/>
                         </a:rPr>
-                        <a:t>15,8x</a:t>
+                        <a:t>12,5x</a:t>
                       </a:r>
                     </a:p>
                   </a:txBody>
@@ -10962,7 +10962,7 @@
                           </a:solidFill>
                           <a:latin typeface="Calibri"/>
                         </a:rPr>
-                        <a:t>3,1x</a:t>
+                        <a:t>2,1x</a:t>
                       </a:r>
                     </a:p>
                   </a:txBody>
@@ -10985,7 +10985,7 @@
                           </a:solidFill>
                           <a:latin typeface="Calibri"/>
                         </a:rPr>
-                        <a:t>22,5x</a:t>
+                        <a:t>18,7x</a:t>
                       </a:r>
                     </a:p>
                   </a:txBody>
@@ -11008,7 +11008,7 @@
                           </a:solidFill>
                           <a:latin typeface="Calibri"/>
                         </a:rPr>
-                        <a:t>58,0 %</a:t>
+                        <a:t>72,5 %</a:t>
                       </a:r>
                     </a:p>
                   </a:txBody>
@@ -11031,7 +11031,7 @@
                           </a:solidFill>
                           <a:latin typeface="Calibri"/>
                         </a:rPr>
-                        <a:t>21,0 %</a:t>
+                        <a:t>18,9 %</a:t>
                       </a:r>
                     </a:p>
                   </a:txBody>
@@ -11056,7 +11056,7 @@
                           </a:solidFill>
                           <a:latin typeface="Calibri"/>
                         </a:rPr>
-                        <a:t>Procter &amp; Gamble Beauty</a:t>
+                        <a:t>Beiersdorf</a:t>
                       </a:r>
                     </a:p>
                   </a:txBody>
@@ -11079,7 +11079,7 @@
                           </a:solidFill>
                           <a:latin typeface="Calibri"/>
                         </a:rPr>
-                        <a:t>PG</a:t>
+                        <a:t>BEI.DE</a:t>
                       </a:r>
                     </a:p>
                   </a:txBody>
@@ -11102,7 +11102,7 @@
                           </a:solidFill>
                           <a:latin typeface="Calibri"/>
                         </a:rPr>
-                        <a:t>380,0</a:t>
+                        <a:t>28,7</a:t>
                       </a:r>
                     </a:p>
                   </a:txBody>
@@ -11125,7 +11125,7 @@
                           </a:solidFill>
                           <a:latin typeface="Calibri"/>
                         </a:rPr>
-                        <a:t>16,5x</a:t>
+                        <a:t>13,8x</a:t>
                       </a:r>
                     </a:p>
                   </a:txBody>
@@ -11148,7 +11148,7 @@
                           </a:solidFill>
                           <a:latin typeface="Calibri"/>
                         </a:rPr>
-                        <a:t>3,5x</a:t>
+                        <a:t>2,7x</a:t>
                       </a:r>
                     </a:p>
                   </a:txBody>
@@ -11171,7 +11171,7 @@
                           </a:solidFill>
                           <a:latin typeface="Calibri"/>
                         </a:rPr>
-                        <a:t>28,3x</a:t>
+                        <a:t>24,3x</a:t>
                       </a:r>
                     </a:p>
                   </a:txBody>
@@ -11194,7 +11194,7 @@
                           </a:solidFill>
                           <a:latin typeface="Calibri"/>
                         </a:rPr>
-                        <a:t>55,0 %</a:t>
+                        <a:t>65,4 %</a:t>
                       </a:r>
                     </a:p>
                   </a:txBody>
@@ -11217,7 +11217,7 @@
                           </a:solidFill>
                           <a:latin typeface="Calibri"/>
                         </a:rPr>
-                        <a:t>24,0 %</a:t>
+                        <a:t>20,1 %</a:t>
                       </a:r>
                     </a:p>
                   </a:txBody>
@@ -11242,7 +11242,7 @@
                           </a:solidFill>
                           <a:latin typeface="Calibri"/>
                         </a:rPr>
-                        <a:t>Beiersdorf</a:t>
+                        <a:t>Procter &amp; Gamble (Beauty)</a:t>
                       </a:r>
                     </a:p>
                   </a:txBody>
@@ -11265,7 +11265,7 @@
                           </a:solidFill>
                           <a:latin typeface="Calibri"/>
                         </a:rPr>
-                        <a:t>BEI.DE</a:t>
+                        <a:t>PG</a:t>
                       </a:r>
                     </a:p>
                   </a:txBody>
@@ -11288,7 +11288,7 @@
                           </a:solidFill>
                           <a:latin typeface="Calibri"/>
                         </a:rPr>
-                        <a:t>28,5</a:t>
+                        <a:t>350,0</a:t>
                       </a:r>
                     </a:p>
                   </a:txBody>
@@ -11311,7 +11311,7 @@
                           </a:solidFill>
                           <a:latin typeface="Calibri"/>
                         </a:rPr>
-                        <a:t>17,1x</a:t>
+                        <a:t>16,5x</a:t>
                       </a:r>
                     </a:p>
                   </a:txBody>
@@ -11334,7 +11334,7 @@
                           </a:solidFill>
                           <a:latin typeface="Calibri"/>
                         </a:rPr>
-                        <a:t>3,3x</a:t>
+                        <a:t>3,2x</a:t>
                       </a:r>
                     </a:p>
                   </a:txBody>
@@ -11357,7 +11357,7 @@
                           </a:solidFill>
                           <a:latin typeface="Calibri"/>
                         </a:rPr>
-                        <a:t>29,8x</a:t>
+                        <a:t>28,9x</a:t>
                       </a:r>
                     </a:p>
                   </a:txBody>
@@ -11380,7 +11380,7 @@
                           </a:solidFill>
                           <a:latin typeface="Calibri"/>
                         </a:rPr>
-                        <a:t>68,0 %</a:t>
+                        <a:t>52,1 %</a:t>
                       </a:r>
                     </a:p>
                   </a:txBody>
@@ -11403,7 +11403,7 @@
                           </a:solidFill>
                           <a:latin typeface="Calibri"/>
                         </a:rPr>
-                        <a:t>23,0 %</a:t>
+                        <a:t>21,5 %</a:t>
                       </a:r>
                     </a:p>
                   </a:txBody>
@@ -11497,7 +11497,7 @@
                           </a:solidFill>
                           <a:latin typeface="Calibri"/>
                         </a:rPr>
-                        <a:t>16,5x</a:t>
+                        <a:t>14,1x</a:t>
                       </a:r>
                     </a:p>
                   </a:txBody>
@@ -11520,7 +11520,7 @@
                           </a:solidFill>
                           <a:latin typeface="Calibri"/>
                         </a:rPr>
-                        <a:t>3,3x</a:t>
+                        <a:t>2,9x</a:t>
                       </a:r>
                     </a:p>
                   </a:txBody>
@@ -11543,7 +11543,7 @@
                           </a:solidFill>
                           <a:latin typeface="Calibri"/>
                         </a:rPr>
-                        <a:t>28,3x</a:t>
+                        <a:t>24,3x</a:t>
                       </a:r>
                     </a:p>
                   </a:txBody>
@@ -11566,7 +11566,7 @@
                           </a:solidFill>
                           <a:latin typeface="Calibri"/>
                         </a:rPr>
-                        <a:t>68,0 %</a:t>
+                        <a:t>65,4 %</a:t>
                       </a:r>
                     </a:p>
                   </a:txBody>
@@ -11589,7 +11589,7 @@
                           </a:solidFill>
                           <a:latin typeface="Calibri"/>
                         </a:rPr>
-                        <a:t>22,0 %</a:t>
+                        <a:t>20,1 %</a:t>
                       </a:r>
                     </a:p>
                   </a:txBody>
@@ -11634,7 +11634,7 @@
                 </a:solidFill>
                 <a:latin typeface="Calibri"/>
               </a:rPr>
-              <a:t>L'Oréal affiche un EV/EBITDA de 17.6x contre une médiane peers de 16.2x (+8.6%), justifiée par une croissance organique supérieure (4-5% vs 2-3% peers) et des marges EBITDA plus élevées. Le P/E de 30.6x est en ligne avec Estée Lauder (32.1x) mais supérieur à Shiseido (18.7x), reflétant une qualité d'actifs supérieure. Une convergence vers la médiane peers impliquerait un downside de 8-10%.</a:t>
+              <a:t>L'Oréal se négocie à une prime de 22% sur EV/EBITDA (17.6x vs 14.4x médiane peers) et 28% sur P/E (30.6x vs 23.9x), justifiée par une croissance organique supérieure (+5.2% vs +3.8% médiane) et des marges plus élevées. Une convergence vers la médiane peers impliquerait un downside de 12%, mais la qualité des actifs et la résilience des marges limitent ce risque.</a:t>
             </a:r>
           </a:p>
         </p:txBody>
@@ -12292,7 +12292,7 @@
                 </a:solidFill>
                 <a:latin typeface="Calibri"/>
               </a:rPr>
-              <a:t>Avec un WACC de 8.5% et une TGR de 2.0%, le DCF implicite est de 385€, soit un upside de 10% vs le cours actuel. La valorisation actuelle intègre déjà une prime de croissance, mais un scénario de réaccélération organique à 4% ou une compression des coûts logistiques pourrait débloquer une valeur supplémentaire.</a:t>
+              <a:t>Avec un WACC de 8.5% et une TGR de 2.0%, le prix implicite DCF est de 365€ (base), soit un upside de 4.1% vs cours actuel. La prime actuelle reflète une croissance déjà anticipée, mais un catalyseur comme un rebond en Chine (+15% CA) ou un succès commercial des innovations 2026 pourrait débloquer la valeur.</a:t>
             </a:r>
           </a:p>
         </p:txBody>
@@ -13265,7 +13265,7 @@
                 </a:solidFill>
                 <a:latin typeface="Calibri"/>
               </a:rPr>
-              <a:t>Marges sous pression Asie</a:t>
+              <a:t>Surévaluation P/E</a:t>
             </a:r>
           </a:p>
         </p:txBody>
@@ -13300,7 +13300,7 @@
                 </a:solidFill>
                 <a:latin typeface="Calibri"/>
               </a:rPr>
-              <a:t>Le pricing power de L'Oréal repose sur des marques premium dont l'élasticité-prix s'avère déjà élevée en Asie, où les ventes ont chuté de 8.2% en 2023 malgré des hausses tarifaires de 7.5%</a:t>
+              <a:t>Le P/E de 30.56x surpasse de 50% la moyenne sectorielle des cosmétiques (20.4x), justifié par une croissance organique de 1.3% seulement, soit le tiers de LVMH et un cinquième d'Estée Lauder. Les marges nettes à 13.9% stagnent depuis 2020 malgré des hausses de prix répétées, signalant une érosion de pouvoir de fixation. Les 3.5% de CA en R&amp;D couvrent à peine l'inflation des coûts de formulation, sans garantie de différenciation durable face aux marques asiatiques.</a:t>
             </a:r>
           </a:p>
         </p:txBody>
@@ -13421,7 +13421,7 @@
                 </a:solidFill>
                 <a:latin typeface="Calibri"/>
               </a:rPr>
-              <a:t>Dépendance géographique critique</a:t>
+              <a:t>Risque Chine</a:t>
             </a:r>
           </a:p>
         </p:txBody>
@@ -13456,7 +13456,7 @@
                 </a:solidFill>
                 <a:latin typeface="Calibri"/>
               </a:rPr>
-              <a:t>La R&amp;D inégalée coûte 3.4% du CA, mais son ROI reste incertain avec un taux d'échec de 85% pour les innovations lancées depuis 2020</a:t>
+              <a:t>Le réseau de distribution global, concentré à 60% en Europe et Amérique du Nord, expose à une saturation des marchés matures où la croissance démographique est nulle. Les 74.3% de marge brute reposent sur des produits haut de gamme, mais les consommateurs chinois, représentant 30% du CA, réduisent leurs dépenses de luxe de 15% depuis 2023 selon McKinsey. La dépendance à la Chine, avec un risque géopolitique accru, pourrait faire chuter le CA de 8% en cas de nouvelle crise…</a:t>
             </a:r>
           </a:p>
         </p:txBody>
@@ -13577,7 +13577,7 @@
                 </a:solidFill>
                 <a:latin typeface="Calibri"/>
               </a:rPr>
-              <a:t>ROI R&amp;D incertain</a:t>
+              <a:t>Dette cachée</a:t>
             </a:r>
           </a:p>
         </p:txBody>
@@ -13612,7 +13612,7 @@
                 </a:solidFill>
                 <a:latin typeface="Calibri"/>
               </a:rPr>
-              <a:t>La résilience géographique masque une dépendance extrême à l'Europe (42% du CA) et aux USA (28%), zones en stagnation démographique et sous pression fiscale.</a:t>
+              <a:t>L'endettement quasi nul (NetDebt/EBITDA=0.02x) masque un besoin en fonds de roulement explosif, passé de 1.2 à 2.1 milliards d'euros entre 2020 et 2024. Les stocks ont augmenté de 22% depuis 2022, signe d'une surproduction face à une demande atone, tandis que les créances clients ont crû de 18%, alourdissant les coûts financiers indirects. L'Altman Z-score à 5.67, bien au-dessus du seuil de 3, reflète une structure financière saine mais ignore la volatilité des devises, avec…</a:t>
             </a:r>
           </a:p>
         </p:txBody>
@@ -13826,7 +13826,7 @@
                           </a:solidFill>
                           <a:latin typeface="Calibri"/>
                         </a:rPr>
-                        <a:t>Ralentissement économique en Europe avec PIB -2% en 2026</a:t>
+                        <a:t>Récession mondiale avec -3% PIB en 2026</a:t>
                       </a:r>
                     </a:p>
                   </a:txBody>
@@ -13897,7 +13897,7 @@
                           </a:solidFill>
                           <a:latin typeface="Calibri"/>
                         </a:rPr>
-                        <a:t>Régulation sanitaire en Europe (REACH) augmentant les coûts de conformité de 100M€/an</a:t>
+                        <a:t>Baisse des dépenses beauté premium de -10% en Chine</a:t>
                       </a:r>
                     </a:p>
                   </a:txBody>
@@ -13968,7 +13968,7 @@
                           </a:solidFill>
                           <a:latin typeface="Calibri"/>
                         </a:rPr>
-                        <a:t>Dégradation de la croissance organique en Chine en dessous de 2% en 2026</a:t>
+                        <a:t>Échec commercial d'une innovation majeure (ex: ligne de soins capillaires)</a:t>
                       </a:r>
                     </a:p>
                   </a:txBody>
@@ -15044,7 +15044,7 @@
                 </a:solidFill>
                 <a:latin typeface="Calibri"/>
               </a:rPr>
-              <a:t>Score agrege : +0,175</a:t>
+              <a:t>Score agrege : +0,140</a:t>
             </a:r>
           </a:p>
         </p:txBody>
@@ -15356,7 +15356,7 @@
                 </a:solidFill>
                 <a:latin typeface="Calibri"/>
               </a:rPr>
-              <a:t>45,0 %</a:t>
+              <a:t>48,0 %</a:t>
             </a:r>
           </a:p>
         </p:txBody>
@@ -15812,7 +15812,7 @@
                           </a:solidFill>
                           <a:latin typeface="Calibri"/>
                         </a:rPr>
-                        <a:t>7</a:t>
+                        <a:t>6</a:t>
                       </a:r>
                     </a:p>
                   </a:txBody>
@@ -15835,7 +15835,7 @@
                           </a:solidFill>
                           <a:latin typeface="Calibri"/>
                         </a:rPr>
-                        <a:t>+0,362</a:t>
+                        <a:t>+0,330</a:t>
                       </a:r>
                     </a:p>
                   </a:txBody>
@@ -15858,7 +15858,7 @@
                           </a:solidFill>
                           <a:latin typeface="Calibri"/>
                         </a:rPr>
-                        <a:t>Croissance organique de 4-5% dans les soins premium et les marchés émergents d'ici 2027 grâce à l'innovation et au digital | Hausse des prix de 5-7% en 2025 malgré l'inflation, soutenant les marges | Automatisation des usines et…</a:t>
+                        <a:t>Lancement de 250 nouveaux produits en 2026 avec un potentiel de +3% CA organique | Innovation dans les soins capillaires premium et dermo-cosmétique | Horizon 2026-2027</a:t>
                       </a:r>
                     </a:p>
                   </a:txBody>
@@ -15906,7 +15906,7 @@
                           </a:solidFill>
                           <a:latin typeface="Calibri"/>
                         </a:rPr>
-                        <a:t>10</a:t>
+                        <a:t>11</a:t>
                       </a:r>
                     </a:p>
                   </a:txBody>
@@ -15929,7 +15929,7 @@
                           </a:solidFill>
                           <a:latin typeface="Calibri"/>
                         </a:rPr>
-                        <a:t>+0,450</a:t>
+                        <a:t>+0,480</a:t>
                       </a:r>
                     </a:p>
                   </a:txBody>
@@ -16023,7 +16023,7 @@
                           </a:solidFill>
                           <a:latin typeface="Calibri"/>
                         </a:rPr>
-                        <a:t>+0,188</a:t>
+                        <a:t>+0,190</a:t>
                       </a:r>
                     </a:p>
                   </a:txBody>
@@ -16046,7 +16046,7 @@
                           </a:solidFill>
                           <a:latin typeface="Calibri"/>
                         </a:rPr>
-                        <a:t>Concurrence accrue des marques asiatiques (Shopee, Perfect Diary) avec une pression sur les prix de -3% à -5% en 2026 | Régulation sanitaire en Europe (REACH) pourrait augmenter les coûts de conformité de 100M€/an | Dépendance au luxe (25%…</a:t>
+                        <a:t>Concurrence accrue d'Estée Lauder en Asie (+12% parts de marché 2025) avec des lancements agressifs | Risque de compression des marges de 100-150bps | Horizon 2026-2027</a:t>
                       </a:r>
                     </a:p>
                   </a:txBody>
@@ -16091,7 +16091,7 @@
                 </a:solidFill>
                 <a:latin typeface="Calibri"/>
               </a:rPr>
-              <a:t>La presse financière souligne une dynamique positive pour L'Oréal cette semaine, portée par des partenariats technologiques et des initiatives durables. Les tensions commerciales et géopolitiques restent des risques majeurs pesant sur le secteur.</a:t>
+              <a:t>La presse financière souligne une dynamique positive pour L'Oréal avec plusieurs partenariats technologiques et initiatives durables. Cependant, les tensions commerciales internationales et les incertitudes macroéconomiques pèsent sur le sentiment global.</a:t>
             </a:r>
           </a:p>
         </p:txBody>
@@ -19029,7 +19029,7 @@
                 </a:solidFill>
                 <a:latin typeface="Calibri"/>
               </a:rPr>
-              <a:t>L'Oréal se négocie à 17.6x EV/EBITDA contre une médiane peers de 16.2x, soit une prime de 8.6%. Le P/E de 30.6x reflète une croissance supérieure mais reste justifié par la qualité des actifs et la visibilité des cash-flows.</a:t>
+              <a:t>L'Oréal se négocie à une prime de 25% vs ses pairs sur le P/E (30.6x vs 24.5x médiane) justifiée par une croissance supérieure et une qualité de marge. Le multiple EV/EBITDA à 17.6x reste attractif vs historique 16-18x.</a:t>
             </a:r>
           </a:p>
         </p:txBody>
@@ -19359,7 +19359,7 @@
                 </a:solidFill>
                 <a:latin typeface="Calibri"/>
               </a:rPr>
-              <a:t>Prix cible base : 385 EUR  ·  Upside : +9,7 %  ·  Bear : 340 EUR (-3,1 %)  ·  Bull : 420 EUR (+19,7 %)</a:t>
+              <a:t>Prix cible base : 375 EUR  ·  Upside : +6,9 %  ·  Bear : 320 EUR (-8,8 %)  ·  Bull : 400 EUR (+14,0 %)</a:t>
             </a:r>
           </a:p>
         </p:txBody>
@@ -19515,7 +19515,7 @@
                 </a:solidFill>
                 <a:latin typeface="Calibri"/>
               </a:rPr>
-              <a:t>Pricing power</a:t>
+              <a:t>Marque premium mondiale</a:t>
             </a:r>
           </a:p>
         </p:txBody>
@@ -19550,7 +19550,7 @@
                 </a:solidFill>
                 <a:latin typeface="Calibri"/>
               </a:rPr>
-              <a:t>L'Oréal bénéficie d'une croissance organique de 4-5% dans les soins premium et les marchés émergents d'ici 2027</a:t>
+              <a:t>L'Oréal devrait bénéficier d'une croissance organique de 5-6% en 2026 grâce à l'accélération en Asie (+18% CA Inde) et au lancement de 250 nouveaux produits</a:t>
             </a:r>
           </a:p>
         </p:txBody>
@@ -19628,7 +19628,7 @@
                 </a:solidFill>
                 <a:latin typeface="Calibri"/>
               </a:rPr>
-              <a:t>R&amp;D inégalée</a:t>
+              <a:t>R&amp;D intensive 3.5% CA</a:t>
             </a:r>
           </a:p>
         </p:txBody>
@@ -19663,7 +19663,7 @@
                 </a:solidFill>
                 <a:latin typeface="Calibri"/>
               </a:rPr>
-              <a:t>Le groupe maintient un pricing power exceptionnel avec des hausses de prix de 5-7% en 2025 malgré l'inflation</a:t>
+              <a:t>Le groupe maintient une marge EBITDA stable à 24.5% en 2026 via un mix favorable premium/mass et une discipline opérationnelle stricte</a:t>
             </a:r>
           </a:p>
         </p:txBody>
@@ -19741,7 +19741,7 @@
                 </a:solidFill>
                 <a:latin typeface="Calibri"/>
               </a:rPr>
-              <a:t>Résilience géographique</a:t>
+              <a:t>Réseau distribution global</a:t>
             </a:r>
           </a:p>
         </p:txBody>
@@ -19776,7 +19776,7 @@
                 </a:solidFill>
                 <a:latin typeface="Calibri"/>
               </a:rPr>
-              <a:t>La marge EBITDA devrait atteindre 25.5% en 2027 grâce à l'automatisation des usines et à la rationalisation des portefeuilles de marques</a:t>
+              <a:t>La trésorerie générée (12.5Md€ en 2026) permet un dividende croissant (+5% en 2026) et des rachats d'actions ciblés, soutenant le ROE à 18%.</a:t>
             </a:r>
           </a:p>
         </p:txBody>
@@ -19932,7 +19932,7 @@
                 </a:solidFill>
                 <a:latin typeface="Calibri"/>
               </a:rPr>
-              <a:t>Concurrence asiatique</a:t>
+              <a:t>Concurrence Estée Lauder</a:t>
             </a:r>
           </a:p>
         </p:txBody>
@@ -19967,7 +19967,7 @@
                 </a:solidFill>
                 <a:latin typeface="Calibri"/>
               </a:rPr>
-              <a:t>Concurrence accrue des marques asiatiques (Shopee, Perfect Diary) avec une pression sur les prix de -3% à -5% en 2026 | Régulation sanitaire en Europe (REACH) pourrait augmenter les coûts de…</a:t>
+              <a:t>Concurrence accrue d'Estée Lauder en Asie (+12% parts de marché 2025) avec des lancements agressifs | Risque de compression des marges de 100-150bps | Horizon 2026-2027</a:t>
             </a:r>
           </a:p>
         </p:txBody>
@@ -20045,7 +20045,7 @@
                 </a:solidFill>
                 <a:latin typeface="Calibri"/>
               </a:rPr>
-              <a:t>Régulation sanitaire</a:t>
+              <a:t>Risque réglementaire cosmétiques</a:t>
             </a:r>
           </a:p>
         </p:txBody>
@@ -20080,7 +20080,7 @@
                 </a:solidFill>
                 <a:latin typeface="Calibri"/>
               </a:rPr>
-              <a:t>Ralentissement économique en Europe (-2% PIB en 2026) pourrait réduire la croissance organique à 1% | Hausse des coûts logistiques (+8% en 2026) due aux tensions géopolitiques et à la hausse des prix…</a:t>
+              <a:t>Réglementation européenne sur les ingrédients cosmétiques (REACH) | Coûts de conformité estimés à 200M€/an | Horizon 6-12 mois</a:t>
             </a:r>
           </a:p>
         </p:txBody>
@@ -20158,7 +20158,7 @@
                 </a:solidFill>
                 <a:latin typeface="Calibri"/>
               </a:rPr>
-              <a:t>Dépendance luxe</a:t>
+              <a:t>Dépendance Asie 35% CA</a:t>
             </a:r>
           </a:p>
         </p:txBody>
@@ -20193,7 +20193,7 @@
                 </a:solidFill>
                 <a:latin typeface="Calibri"/>
               </a:rPr>
-              <a:t>La résilience géographique masque une dépendance extrême à l'Europe (42% du CA) et aux USA (28%), zones en stagnation démographique et sous pression fiscale.</a:t>
+              <a:t>Ralentissement économique en Chine (-5% croissance 2026) | Baisse des ventes premium (-8% CA) | Horizon 2026</a:t>
             </a:r>
           </a:p>
         </p:txBody>
@@ -20470,7 +20470,7 @@
                 </a:solidFill>
                 <a:latin typeface="Calibri"/>
               </a:rPr>
-              <a:t>vs 16,5x médiane peers</a:t>
+              <a:t>vs 14,1x médiane peers</a:t>
             </a:r>
           </a:p>
         </p:txBody>
@@ -20782,7 +20782,7 @@
                 </a:solidFill>
                 <a:latin typeface="Calibri"/>
               </a:rPr>
-              <a:t>385 EUR</a:t>
+              <a:t>375 EUR</a:t>
             </a:r>
           </a:p>
         </p:txBody>
@@ -20852,7 +20852,7 @@
                 </a:solidFill>
                 <a:latin typeface="Calibri"/>
               </a:rPr>
-              <a:t>Upside de +9,7 % vs cours</a:t>
+              <a:t>Upside de +6,9 % vs cours</a:t>
             </a:r>
           </a:p>
         </p:txBody>
@@ -20973,7 +20973,7 @@
                 </a:solidFill>
                 <a:latin typeface="Calibri"/>
               </a:rPr>
-              <a:t>+0,175</a:t>
+              <a:t>+0,140</a:t>
             </a:r>
           </a:p>
         </p:txBody>
@@ -23672,7 +23672,7 @@
                 </a:solidFill>
                 <a:latin typeface="Calibri"/>
               </a:rPr>
-              <a:t>L'Oréal affiche une résilience opérationnelle remarquable avec des marges stables malgré un environnement inflationniste. La croissance organique de 1.3% en 2025 masque une dynamique segmentaire différenciée, notamment dans les soins premium et les marchés émergents. La valorisation actuelle ne refl</a:t>
+              <a:t>L'Oréal affiche une résilience opérationnelle remarquable avec des marges stables malgré un environnement macroéconomique incertain. La diversification géographique et par catégories de produits soutient une croissance organique robuste à long terme.</a:t>
             </a:r>
           </a:p>
         </p:txBody>
@@ -24715,7 +24715,7 @@
                 </a:solidFill>
                 <a:latin typeface="Calibri"/>
               </a:rPr>
-              <a:t>Concurrence asiatique  ·  Régulation sanitaire</a:t>
+              <a:t>Concurrence Estée Lauder  ·  Risque réglementaire cosmétiques</a:t>
             </a:r>
           </a:p>
         </p:txBody>
@@ -25949,7 +25949,7 @@
                 </a:solidFill>
                 <a:latin typeface="Calibri"/>
               </a:rPr>
-              <a:t>L'Oréal S.A. est le leader mondial des produits de beauté avec un portefeuille diversifié couvrant les soins, le maquillage, les parfums et les soins capillaires. Positionné sur le premium à travers des marques comme Lancôme ou La Roche-Posay, le groupe cible les consommateurs exigeants via l'innovation et le digital. Ses avantages concurrentiels incluent une R&amp;D inégalée, une distribution mondiale optimisée et une résilience face aux cycles économiques grâce à la diversification géographique et segmentaire. L'entreprise articule son activité autour de deux segments stratégiques :</a:t>
+              <a:t>L'Oréal est le leader mondial des produits de beauté avec un portefeuille diversifié couvrant les soins, le maquillage, les parfums et les soins capillaires. Positionné sur tous les segments de marché (premium, mass et dermo-cosmétique), le groupe mise sur l'innovation et le digital pour renforcer sa compétitivité. Ses avantages incluent une marque forte, une R&amp;D intensive et une présence mondiale optimisée avec 36 marques internationales et une croissance soutenue en Asie et Amérique latine. L'entreprise articule son activité autour de deux segments stratégiques :</a:t>
             </a:r>
           </a:p>
         </p:txBody>
@@ -26062,7 +26062,7 @@
                 </a:solidFill>
                 <a:latin typeface="Calibri"/>
               </a:rPr>
-              <a:t>Segment le plus large avec des marques comme Garnier et L'Oréal Paris, ciblant les consommateurs via la grande distribution et le e-commerce. Modèle basé sur le volume et l'accessibilité, avec une croissance tirée par l'Asie et l'Amérique latine. Marges sous pression mais compensées par des économies d'échelle et une gestion rigoureuse des coûts.</a:t>
+              <a:t>Segment le plus important avec des marques comme L'Oréal Paris et Garnier, distribuées via la grande distribution et le e-commerce. Modèle reposant sur des volumes élevés et une stratégie de prix accessibles. Clients cibles : consommateurs sensibles au rapport qualité-prix. Croissance tirée par l'expansion en Inde (+15% CA 2025) et le développement des routines digitales (30% des ventes en ligne en 2025).</a:t>
             </a:r>
           </a:p>
         </p:txBody>
@@ -26175,7 +26175,7 @@
                 </a:solidFill>
                 <a:latin typeface="Calibri"/>
               </a:rPr>
-              <a:t>Cible les salons de coiffure avec des marques comme Kérastase et Redken. Modèle récurrent basé sur des contrats de distribution et des services aux professionnels. Croissance stable grâce à la fidélisation des salons et à l'innovation produit. Marges élevées et résilientes aux cycles économiques.</a:t>
+              <a:t>Cible les salons de coiffure avec des marques comme Kérastase et Redken. Modèle basé sur des marges élevées et une fidélisation des professionnels via des formations et des innovations produits. Clients cibles : coiffeurs haut de gamme. Croissance soutenue par la demande en soins capillaires premium (+8% CA 2025) et l'expansion en Chine (+12% CA 2025).</a:t>
             </a:r>
           </a:p>
         </p:txBody>
@@ -27554,7 +27554,7 @@
                 </a:solidFill>
                 <a:latin typeface="Calibri"/>
               </a:rPr>
-              <a:t>45%</a:t>
+              <a:t>42%</a:t>
             </a:r>
           </a:p>
         </p:txBody>
@@ -27702,7 +27702,7 @@
                 </a:solidFill>
                 <a:latin typeface="Calibri"/>
               </a:rPr>
-              <a:t>Segment le plus large avec des marques comme Garnier et L'Oréal Paris, ciblant les consommateurs via la grande distribution et le e-commerce. Modèle basé sur le volume et l'accessibilité, avec une croissance tirée par l'Asie et l'Amérique latine. Marges sous pression mais compensées par des économies d'échelle et une gestion rigoureuse des coûts.</a:t>
+              <a:t>Segment le plus important avec des marques comme L'Oréal Paris et Garnier, distribuées via la grande distribution et le e-commerce. Modèle reposant sur des volumes élevés et une stratégie de prix accessibles. Clients cibles : consommateurs sensibles au rapport qualité-prix. Croissance tirée par l'expansion en Inde (+15% CA 2025) et le développement des routines digitales (30% des ventes en ligne en 2025).</a:t>
             </a:r>
           </a:p>
         </p:txBody>
@@ -27823,7 +27823,7 @@
                 </a:solidFill>
                 <a:latin typeface="Calibri"/>
               </a:rPr>
-              <a:t>23%</a:t>
+              <a:t>22%</a:t>
             </a:r>
           </a:p>
         </p:txBody>
@@ -27971,7 +27971,7 @@
                 </a:solidFill>
                 <a:latin typeface="Calibri"/>
               </a:rPr>
-              <a:t>Cible les salons de coiffure avec des marques comme Kérastase et Redken. Modèle récurrent basé sur des contrats de distribution et des services aux professionnels. Croissance stable grâce à la fidélisation des salons et à l'innovation produit. Marges élevées et résilientes aux cycles économiques.</a:t>
+              <a:t>Cible les salons de coiffure avec des marques comme Kérastase et Redken. Modèle basé sur des marges élevées et une fidélisation des professionnels via des formations et des innovations produits. Clients cibles : coiffeurs haut de gamme. Croissance soutenue par la demande en soins capillaires premium (+8% CA 2025) et l'expansion en Chine (+12% CA 2025).</a:t>
             </a:r>
           </a:p>
         </p:txBody>
@@ -29100,7 +29100,7 @@
                           </a:solidFill>
                           <a:latin typeface="Calibri"/>
                         </a:rPr>
-                        <a:t>45,2</a:t>
+                        <a:t>46,3</a:t>
                       </a:r>
                     </a:p>
                   </a:txBody>
@@ -29123,7 +29123,7 @@
                           </a:solidFill>
                           <a:latin typeface="Calibri"/>
                         </a:rPr>
-                        <a:t>47,0</a:t>
+                        <a:t>48,6</a:t>
                       </a:r>
                     </a:p>
                   </a:txBody>
@@ -29240,7 +29240,7 @@
                           </a:solidFill>
                           <a:latin typeface="Calibri"/>
                         </a:rPr>
-                        <a:t>+2,6 %</a:t>
+                        <a:t>+5,0 %</a:t>
                       </a:r>
                     </a:p>
                   </a:txBody>
@@ -29263,7 +29263,7 @@
                           </a:solidFill>
                           <a:latin typeface="Calibri"/>
                         </a:rPr>
-                        <a:t>+4,0 %</a:t>
+                        <a:t>+5,0 %</a:t>
                       </a:r>
                     </a:p>
                   </a:txBody>
@@ -29380,7 +29380,7 @@
                           </a:solidFill>
                           <a:latin typeface="Calibri"/>
                         </a:rPr>
-                        <a:t>33,7</a:t>
+                        <a:t>34,5</a:t>
                       </a:r>
                     </a:p>
                   </a:txBody>
@@ -29403,7 +29403,7 @@
                           </a:solidFill>
                           <a:latin typeface="Calibri"/>
                         </a:rPr>
-                        <a:t>35,2</a:t>
+                        <a:t>36,3</a:t>
                       </a:r>
                     </a:p>
                   </a:txBody>
@@ -29543,7 +29543,7 @@
                           </a:solidFill>
                           <a:latin typeface="Calibri"/>
                         </a:rPr>
-                        <a:t>74,8 %</a:t>
+                        <a:t>74,7 %</a:t>
                       </a:r>
                     </a:p>
                   </a:txBody>
@@ -29660,7 +29660,7 @@
                           </a:solidFill>
                           <a:latin typeface="Calibri"/>
                         </a:rPr>
-                        <a:t>11,4</a:t>
+                        <a:t>11,3</a:t>
                       </a:r>
                     </a:p>
                   </a:txBody>
@@ -29800,7 +29800,7 @@
                           </a:solidFill>
                           <a:latin typeface="Calibri"/>
                         </a:rPr>
-                        <a:t>25,2 %</a:t>
+                        <a:t>24,5 %</a:t>
                       </a:r>
                     </a:p>
                   </a:txBody>
@@ -29823,7 +29823,7 @@
                           </a:solidFill>
                           <a:latin typeface="Calibri"/>
                         </a:rPr>
-                        <a:t>25,3 %</a:t>
+                        <a:t>24,5 %</a:t>
                       </a:r>
                     </a:p>
                   </a:txBody>
@@ -29940,7 +29940,7 @@
                           </a:solidFill>
                           <a:latin typeface="Calibri"/>
                         </a:rPr>
-                        <a:t>6,2</a:t>
+                        <a:t>6,4</a:t>
                       </a:r>
                     </a:p>
                   </a:txBody>
@@ -29963,7 +29963,7 @@
                           </a:solidFill>
                           <a:latin typeface="Calibri"/>
                         </a:rPr>
-                        <a:t>6,6</a:t>
+                        <a:t>6,8</a:t>
                       </a:r>
                     </a:p>
                   </a:txBody>
@@ -30080,7 +30080,7 @@
                           </a:solidFill>
                           <a:latin typeface="Calibri"/>
                         </a:rPr>
-                        <a:t>13,7 %</a:t>
+                        <a:t>13,9 %</a:t>
                       </a:r>
                     </a:p>
                   </a:txBody>
@@ -30103,7 +30103,7 @@
                           </a:solidFill>
                           <a:latin typeface="Calibri"/>
                         </a:rPr>
-                        <a:t>14,1 %</a:t>
+                        <a:t>13,9 %</a:t>
                       </a:r>
                     </a:p>
                   </a:txBody>
@@ -30148,7 +30148,7 @@
                 </a:solidFill>
                 <a:latin typeface="Calibri"/>
               </a:rPr>
-              <a:t>Croissance organique de 1.3% en 2025 masquée par un mix défavorable (Asie -3% vs Europe +2%). Marges nettes en légère baisse à 13.9% due à l'inflation et aux coûts logistiques, compensée par un levier opérationnel de 150bps sur l'EBITDA. La génération de cash reste robuste avec un FCF de 5.2Mds€, soutenant un dividende en hausse de 5.2% à 5.70€/action.</a:t>
+              <a:t>Croissance du CA modérée à +1.3% en 2025 mais avec une stabilisation des marges (GM 74.3%, EBITDA 24.3%) grâce à un mix produit favorable et une gestion rigoureuse des coûts. Le levier opérationnel reste intact avec un ROIC à 19.8%, soutenant une génération de cash robuste (10.8Md€ en 2025). La solidité bilancielle (Net Debt/EBITDA 0.0x) offre une flexibilité pour des acquisitions ciblées ou des rachats d'actions.</a:t>
             </a:r>
           </a:p>
         </p:txBody>
@@ -32065,7 +32065,7 @@
                 </a:solidFill>
                 <a:latin typeface="Calibri"/>
               </a:rPr>
-              <a:t>Croissance organique de 1.3% en 2025 masquée par un mix défavorable (Asie -3% vs Europe +2%). Marges nettes en légère baisse à 13.9% due à l'inflation et aux coûts logistiques, compensée par un levier opérationnel de 150bps sur l'EBITDA. La génération de cash reste robuste avec un FCF de 5.2Mds€, so</a:t>
+              <a:t>Croissance du CA modérée à +1.3% en 2025 mais avec une stabilisation des marges (GM 74.3%, EBITDA 24.3%) grâce à un mix produit favorable et une gestion rigoureuse des coûts. Le levier opérationnel reste intact avec un ROIC à 19.8%, soutenant une génération de cash robuste (10.8Md€ en 2025). La soli</a:t>
             </a:r>
           </a:p>
         </p:txBody>
